--- a/VOIS MAJOR PROJECT PPT KUSHAL.pptx
+++ b/VOIS MAJOR PROJECT PPT KUSHAL.pptx
@@ -5,10 +5,10 @@
     <p:sldMasterId id="2147483747" r:id="rId4"/>
   </p:sldMasterIdLst>
   <p:notesMasterIdLst>
-    <p:notesMasterId r:id="rId23"/>
+    <p:notesMasterId r:id="rId21"/>
   </p:notesMasterIdLst>
   <p:handoutMasterIdLst>
-    <p:handoutMasterId r:id="rId24"/>
+    <p:handoutMasterId r:id="rId22"/>
   </p:handoutMasterIdLst>
   <p:sldIdLst>
     <p:sldId id="338" r:id="rId5"/>
@@ -23,12 +23,10 @@
     <p:sldId id="346" r:id="rId14"/>
     <p:sldId id="347" r:id="rId15"/>
     <p:sldId id="348" r:id="rId16"/>
-    <p:sldId id="349" r:id="rId17"/>
-    <p:sldId id="350" r:id="rId18"/>
-    <p:sldId id="341" r:id="rId19"/>
-    <p:sldId id="342" r:id="rId20"/>
-    <p:sldId id="343" r:id="rId21"/>
-    <p:sldId id="304" r:id="rId22"/>
+    <p:sldId id="341" r:id="rId17"/>
+    <p:sldId id="342" r:id="rId18"/>
+    <p:sldId id="343" r:id="rId19"/>
+    <p:sldId id="304" r:id="rId20"/>
   </p:sldIdLst>
   <p:sldSz cx="12192000" cy="6858000"/>
   <p:notesSz cx="6858000" cy="9144000"/>
@@ -14075,2036 +14073,6 @@
         <p:cNvPr id="1" name="">
           <a:extLst>
             <a:ext uri="{FF2B5EF4-FFF2-40B4-BE49-F238E27FC236}">
-              <a16:creationId xmlns:a16="http://schemas.microsoft.com/office/drawing/2014/main" id="{D1579F79-4E40-747A-6967-D35C5A4A6E46}"/>
-            </a:ext>
-          </a:extLst>
-        </p:cNvPr>
-        <p:cNvGrpSpPr/>
-        <p:nvPr/>
-      </p:nvGrpSpPr>
-      <p:grpSpPr>
-        <a:xfrm>
-          <a:off x="0" y="0"/>
-          <a:ext cx="0" cy="0"/>
-          <a:chOff x="0" y="0"/>
-          <a:chExt cx="0" cy="0"/>
-        </a:xfrm>
-      </p:grpSpPr>
-      <p:pic>
-        <p:nvPicPr>
-          <p:cNvPr id="5" name="Picture 4">
-            <a:extLst>
-              <a:ext uri="{FF2B5EF4-FFF2-40B4-BE49-F238E27FC236}">
-                <a16:creationId xmlns:a16="http://schemas.microsoft.com/office/drawing/2014/main" id="{D7AE3097-3AF6-9830-8E14-7D96A3CB6E28}"/>
-              </a:ext>
-            </a:extLst>
-          </p:cNvPr>
-          <p:cNvPicPr>
-            <a:picLocks noChangeAspect="1"/>
-          </p:cNvPicPr>
-          <p:nvPr/>
-        </p:nvPicPr>
-        <p:blipFill rotWithShape="1">
-          <a:blip r:embed="rId2"/>
-          <a:srcRect t="96181"/>
-          <a:stretch/>
-        </p:blipFill>
-        <p:spPr>
-          <a:xfrm>
-            <a:off x="675957" y="6471920"/>
-            <a:ext cx="2143125" cy="193040"/>
-          </a:xfrm>
-          <a:prstGeom prst="rect">
-            <a:avLst/>
-          </a:prstGeom>
-        </p:spPr>
-      </p:pic>
-      <p:sp>
-        <p:nvSpPr>
-          <p:cNvPr id="4" name="Title 3">
-            <a:extLst>
-              <a:ext uri="{FF2B5EF4-FFF2-40B4-BE49-F238E27FC236}">
-                <a16:creationId xmlns:a16="http://schemas.microsoft.com/office/drawing/2014/main" id="{85BF807D-2DE1-102F-AE6A-71B040D3B1D4}"/>
-              </a:ext>
-            </a:extLst>
-          </p:cNvPr>
-          <p:cNvSpPr>
-            <a:spLocks noGrp="1"/>
-          </p:cNvSpPr>
-          <p:nvPr>
-            <p:ph type="title"/>
-          </p:nvPr>
-        </p:nvSpPr>
-        <p:spPr>
-          <a:xfrm>
-            <a:off x="740125" y="155140"/>
-            <a:ext cx="2981643" cy="830997"/>
-          </a:xfrm>
-        </p:spPr>
-        <p:txBody>
-          <a:bodyPr>
-            <a:normAutofit/>
-          </a:bodyPr>
-          <a:lstStyle/>
-          <a:p>
-            <a:r>
-              <a:rPr lang="en-GB" dirty="0"/>
-              <a:t>RESULTS </a:t>
-            </a:r>
-            <a:endParaRPr lang="en-IN" dirty="0"/>
-          </a:p>
-        </p:txBody>
-      </p:sp>
-      <p:sp>
-        <p:nvSpPr>
-          <p:cNvPr id="7" name="Text Placeholder 30">
-            <a:extLst>
-              <a:ext uri="{FF2B5EF4-FFF2-40B4-BE49-F238E27FC236}">
-                <a16:creationId xmlns:a16="http://schemas.microsoft.com/office/drawing/2014/main" id="{17FF57B0-674A-FAF2-A8D2-9DE8C9C966BD}"/>
-              </a:ext>
-            </a:extLst>
-          </p:cNvPr>
-          <p:cNvSpPr txBox="1">
-            <a:spLocks/>
-          </p:cNvSpPr>
-          <p:nvPr/>
-        </p:nvSpPr>
-        <p:spPr>
-          <a:xfrm>
-            <a:off x="320982" y="1275371"/>
-            <a:ext cx="3343561" cy="666078"/>
-          </a:xfrm>
-          <a:prstGeom prst="rect">
-            <a:avLst/>
-          </a:prstGeom>
-        </p:spPr>
-        <p:txBody>
-          <a:bodyPr vert="horz" lIns="91440" tIns="45720" rIns="91440" bIns="45720" rtlCol="0">
-            <a:normAutofit/>
-          </a:bodyPr>
-          <a:lstStyle>
-            <a:lvl1pPr marL="0" indent="0" algn="ctr" defTabSz="457200" rtl="0" eaLnBrk="1" latinLnBrk="0" hangingPunct="1">
-              <a:spcBef>
-                <a:spcPts val="1000"/>
-              </a:spcBef>
-              <a:spcAft>
-                <a:spcPts val="0"/>
-              </a:spcAft>
-              <a:buClr>
-                <a:schemeClr val="accent1"/>
-              </a:buClr>
-              <a:buSzPct val="80000"/>
-              <a:buFont typeface="Wingdings 3" charset="2"/>
-              <a:buNone/>
-              <a:defRPr lang="en-US" sz="1600" kern="1200" dirty="0" smtClean="0">
-                <a:solidFill>
-                  <a:schemeClr val="tx1"/>
-                </a:solidFill>
-                <a:latin typeface="+mn-lt"/>
-                <a:ea typeface="+mn-ea"/>
-                <a:cs typeface="+mn-cs"/>
-              </a:defRPr>
-            </a:lvl1pPr>
-            <a:lvl2pPr marL="742950" indent="-285750" algn="l" defTabSz="457200" rtl="0" eaLnBrk="1" latinLnBrk="0" hangingPunct="1">
-              <a:spcBef>
-                <a:spcPts val="1000"/>
-              </a:spcBef>
-              <a:spcAft>
-                <a:spcPts val="0"/>
-              </a:spcAft>
-              <a:buClr>
-                <a:schemeClr val="accent1"/>
-              </a:buClr>
-              <a:buSzPct val="80000"/>
-              <a:buFont typeface="Wingdings 3" charset="2"/>
-              <a:buChar char=""/>
-              <a:defRPr sz="1600" kern="1200">
-                <a:solidFill>
-                  <a:schemeClr val="tx1">
-                    <a:lumMod val="75000"/>
-                    <a:lumOff val="25000"/>
-                  </a:schemeClr>
-                </a:solidFill>
-                <a:latin typeface="+mn-lt"/>
-                <a:ea typeface="+mn-ea"/>
-                <a:cs typeface="+mn-cs"/>
-              </a:defRPr>
-            </a:lvl2pPr>
-            <a:lvl3pPr marL="1143000" indent="-228600" algn="l" defTabSz="457200" rtl="0" eaLnBrk="1" latinLnBrk="0" hangingPunct="1">
-              <a:spcBef>
-                <a:spcPts val="1000"/>
-              </a:spcBef>
-              <a:spcAft>
-                <a:spcPts val="0"/>
-              </a:spcAft>
-              <a:buClr>
-                <a:schemeClr val="accent1"/>
-              </a:buClr>
-              <a:buSzPct val="80000"/>
-              <a:buFont typeface="Wingdings 3" charset="2"/>
-              <a:buChar char=""/>
-              <a:defRPr sz="1400" kern="1200">
-                <a:solidFill>
-                  <a:schemeClr val="tx1">
-                    <a:lumMod val="75000"/>
-                    <a:lumOff val="25000"/>
-                  </a:schemeClr>
-                </a:solidFill>
-                <a:latin typeface="+mn-lt"/>
-                <a:ea typeface="+mn-ea"/>
-                <a:cs typeface="+mn-cs"/>
-              </a:defRPr>
-            </a:lvl3pPr>
-            <a:lvl4pPr marL="1600200" indent="-228600" algn="l" defTabSz="457200" rtl="0" eaLnBrk="1" latinLnBrk="0" hangingPunct="1">
-              <a:spcBef>
-                <a:spcPts val="1000"/>
-              </a:spcBef>
-              <a:spcAft>
-                <a:spcPts val="0"/>
-              </a:spcAft>
-              <a:buClr>
-                <a:schemeClr val="accent1"/>
-              </a:buClr>
-              <a:buSzPct val="80000"/>
-              <a:buFont typeface="Wingdings 3" charset="2"/>
-              <a:buChar char=""/>
-              <a:defRPr sz="1200" kern="1200">
-                <a:solidFill>
-                  <a:schemeClr val="tx1">
-                    <a:lumMod val="75000"/>
-                    <a:lumOff val="25000"/>
-                  </a:schemeClr>
-                </a:solidFill>
-                <a:latin typeface="+mn-lt"/>
-                <a:ea typeface="+mn-ea"/>
-                <a:cs typeface="+mn-cs"/>
-              </a:defRPr>
-            </a:lvl4pPr>
-            <a:lvl5pPr marL="2057400" indent="-228600" algn="l" defTabSz="457200" rtl="0" eaLnBrk="1" latinLnBrk="0" hangingPunct="1">
-              <a:spcBef>
-                <a:spcPts val="1000"/>
-              </a:spcBef>
-              <a:spcAft>
-                <a:spcPts val="0"/>
-              </a:spcAft>
-              <a:buClr>
-                <a:schemeClr val="accent1"/>
-              </a:buClr>
-              <a:buSzPct val="80000"/>
-              <a:buFont typeface="Wingdings 3" charset="2"/>
-              <a:buChar char=""/>
-              <a:defRPr sz="1200" kern="1200">
-                <a:solidFill>
-                  <a:schemeClr val="tx1">
-                    <a:lumMod val="75000"/>
-                    <a:lumOff val="25000"/>
-                  </a:schemeClr>
-                </a:solidFill>
-                <a:latin typeface="+mn-lt"/>
-                <a:ea typeface="+mn-ea"/>
-                <a:cs typeface="+mn-cs"/>
-              </a:defRPr>
-            </a:lvl5pPr>
-            <a:lvl6pPr marL="2514600" indent="-228600" algn="l" defTabSz="457200" rtl="0" eaLnBrk="1" latinLnBrk="0" hangingPunct="1">
-              <a:spcBef>
-                <a:spcPts val="1000"/>
-              </a:spcBef>
-              <a:spcAft>
-                <a:spcPts val="0"/>
-              </a:spcAft>
-              <a:buClr>
-                <a:schemeClr val="accent1"/>
-              </a:buClr>
-              <a:buSzPct val="80000"/>
-              <a:buFont typeface="Wingdings 3" charset="2"/>
-              <a:buChar char=""/>
-              <a:defRPr sz="1200" kern="1200">
-                <a:solidFill>
-                  <a:schemeClr val="tx1">
-                    <a:lumMod val="75000"/>
-                    <a:lumOff val="25000"/>
-                  </a:schemeClr>
-                </a:solidFill>
-                <a:latin typeface="+mn-lt"/>
-                <a:ea typeface="+mn-ea"/>
-                <a:cs typeface="+mn-cs"/>
-              </a:defRPr>
-            </a:lvl6pPr>
-            <a:lvl7pPr marL="2971800" indent="-228600" algn="l" defTabSz="457200" rtl="0" eaLnBrk="1" latinLnBrk="0" hangingPunct="1">
-              <a:spcBef>
-                <a:spcPts val="1000"/>
-              </a:spcBef>
-              <a:spcAft>
-                <a:spcPts val="0"/>
-              </a:spcAft>
-              <a:buClr>
-                <a:schemeClr val="accent1"/>
-              </a:buClr>
-              <a:buSzPct val="80000"/>
-              <a:buFont typeface="Wingdings 3" charset="2"/>
-              <a:buChar char=""/>
-              <a:defRPr sz="1200" kern="1200">
-                <a:solidFill>
-                  <a:schemeClr val="tx1">
-                    <a:lumMod val="75000"/>
-                    <a:lumOff val="25000"/>
-                  </a:schemeClr>
-                </a:solidFill>
-                <a:latin typeface="+mn-lt"/>
-                <a:ea typeface="+mn-ea"/>
-                <a:cs typeface="+mn-cs"/>
-              </a:defRPr>
-            </a:lvl7pPr>
-            <a:lvl8pPr marL="3429000" indent="-228600" algn="l" defTabSz="457200" rtl="0" eaLnBrk="1" latinLnBrk="0" hangingPunct="1">
-              <a:spcBef>
-                <a:spcPts val="1000"/>
-              </a:spcBef>
-              <a:spcAft>
-                <a:spcPts val="0"/>
-              </a:spcAft>
-              <a:buClr>
-                <a:schemeClr val="accent1"/>
-              </a:buClr>
-              <a:buSzPct val="80000"/>
-              <a:buFont typeface="Wingdings 3" charset="2"/>
-              <a:buChar char=""/>
-              <a:defRPr sz="1200" kern="1200">
-                <a:solidFill>
-                  <a:schemeClr val="tx1">
-                    <a:lumMod val="75000"/>
-                    <a:lumOff val="25000"/>
-                  </a:schemeClr>
-                </a:solidFill>
-                <a:latin typeface="+mn-lt"/>
-                <a:ea typeface="+mn-ea"/>
-                <a:cs typeface="+mn-cs"/>
-              </a:defRPr>
-            </a:lvl8pPr>
-            <a:lvl9pPr marL="3886200" indent="-228600" algn="l" defTabSz="457200" rtl="0" eaLnBrk="1" latinLnBrk="0" hangingPunct="1">
-              <a:spcBef>
-                <a:spcPts val="1000"/>
-              </a:spcBef>
-              <a:spcAft>
-                <a:spcPts val="0"/>
-              </a:spcAft>
-              <a:buClr>
-                <a:schemeClr val="accent1"/>
-              </a:buClr>
-              <a:buSzPct val="80000"/>
-              <a:buFont typeface="Wingdings 3" charset="2"/>
-              <a:buChar char=""/>
-              <a:defRPr sz="1200" kern="1200">
-                <a:solidFill>
-                  <a:schemeClr val="tx1">
-                    <a:lumMod val="75000"/>
-                    <a:lumOff val="25000"/>
-                  </a:schemeClr>
-                </a:solidFill>
-                <a:latin typeface="+mn-lt"/>
-                <a:ea typeface="+mn-ea"/>
-                <a:cs typeface="+mn-cs"/>
-              </a:defRPr>
-            </a:lvl9pPr>
-          </a:lstStyle>
-          <a:p>
-            <a:endParaRPr lang="en-GB" sz="2000" dirty="0"/>
-          </a:p>
-        </p:txBody>
-      </p:sp>
-      <p:sp>
-        <p:nvSpPr>
-          <p:cNvPr id="8" name="Text Placeholder 30">
-            <a:extLst>
-              <a:ext uri="{FF2B5EF4-FFF2-40B4-BE49-F238E27FC236}">
-                <a16:creationId xmlns:a16="http://schemas.microsoft.com/office/drawing/2014/main" id="{B34963B7-2F2C-A38E-13AD-20785FDA6FE5}"/>
-              </a:ext>
-            </a:extLst>
-          </p:cNvPr>
-          <p:cNvSpPr txBox="1">
-            <a:spLocks/>
-          </p:cNvSpPr>
-          <p:nvPr/>
-        </p:nvSpPr>
-        <p:spPr>
-          <a:xfrm>
-            <a:off x="4345694" y="1275371"/>
-            <a:ext cx="3343561" cy="666078"/>
-          </a:xfrm>
-          <a:prstGeom prst="rect">
-            <a:avLst/>
-          </a:prstGeom>
-        </p:spPr>
-        <p:txBody>
-          <a:bodyPr vert="horz" lIns="91440" tIns="45720" rIns="91440" bIns="45720" rtlCol="0">
-            <a:normAutofit/>
-          </a:bodyPr>
-          <a:lstStyle>
-            <a:lvl1pPr marL="0" indent="0" algn="ctr" defTabSz="457200" rtl="0" eaLnBrk="1" latinLnBrk="0" hangingPunct="1">
-              <a:spcBef>
-                <a:spcPts val="1000"/>
-              </a:spcBef>
-              <a:spcAft>
-                <a:spcPts val="0"/>
-              </a:spcAft>
-              <a:buClr>
-                <a:schemeClr val="accent1"/>
-              </a:buClr>
-              <a:buSzPct val="80000"/>
-              <a:buFont typeface="Wingdings 3" charset="2"/>
-              <a:buNone/>
-              <a:defRPr lang="en-US" sz="1600" kern="1200" dirty="0" smtClean="0">
-                <a:solidFill>
-                  <a:schemeClr val="tx1"/>
-                </a:solidFill>
-                <a:latin typeface="+mn-lt"/>
-                <a:ea typeface="+mn-ea"/>
-                <a:cs typeface="+mn-cs"/>
-              </a:defRPr>
-            </a:lvl1pPr>
-            <a:lvl2pPr marL="742950" indent="-285750" algn="l" defTabSz="457200" rtl="0" eaLnBrk="1" latinLnBrk="0" hangingPunct="1">
-              <a:spcBef>
-                <a:spcPts val="1000"/>
-              </a:spcBef>
-              <a:spcAft>
-                <a:spcPts val="0"/>
-              </a:spcAft>
-              <a:buClr>
-                <a:schemeClr val="accent1"/>
-              </a:buClr>
-              <a:buSzPct val="80000"/>
-              <a:buFont typeface="Wingdings 3" charset="2"/>
-              <a:buChar char=""/>
-              <a:defRPr sz="1600" kern="1200">
-                <a:solidFill>
-                  <a:schemeClr val="tx1">
-                    <a:lumMod val="75000"/>
-                    <a:lumOff val="25000"/>
-                  </a:schemeClr>
-                </a:solidFill>
-                <a:latin typeface="+mn-lt"/>
-                <a:ea typeface="+mn-ea"/>
-                <a:cs typeface="+mn-cs"/>
-              </a:defRPr>
-            </a:lvl2pPr>
-            <a:lvl3pPr marL="1143000" indent="-228600" algn="l" defTabSz="457200" rtl="0" eaLnBrk="1" latinLnBrk="0" hangingPunct="1">
-              <a:spcBef>
-                <a:spcPts val="1000"/>
-              </a:spcBef>
-              <a:spcAft>
-                <a:spcPts val="0"/>
-              </a:spcAft>
-              <a:buClr>
-                <a:schemeClr val="accent1"/>
-              </a:buClr>
-              <a:buSzPct val="80000"/>
-              <a:buFont typeface="Wingdings 3" charset="2"/>
-              <a:buChar char=""/>
-              <a:defRPr sz="1400" kern="1200">
-                <a:solidFill>
-                  <a:schemeClr val="tx1">
-                    <a:lumMod val="75000"/>
-                    <a:lumOff val="25000"/>
-                  </a:schemeClr>
-                </a:solidFill>
-                <a:latin typeface="+mn-lt"/>
-                <a:ea typeface="+mn-ea"/>
-                <a:cs typeface="+mn-cs"/>
-              </a:defRPr>
-            </a:lvl3pPr>
-            <a:lvl4pPr marL="1600200" indent="-228600" algn="l" defTabSz="457200" rtl="0" eaLnBrk="1" latinLnBrk="0" hangingPunct="1">
-              <a:spcBef>
-                <a:spcPts val="1000"/>
-              </a:spcBef>
-              <a:spcAft>
-                <a:spcPts val="0"/>
-              </a:spcAft>
-              <a:buClr>
-                <a:schemeClr val="accent1"/>
-              </a:buClr>
-              <a:buSzPct val="80000"/>
-              <a:buFont typeface="Wingdings 3" charset="2"/>
-              <a:buChar char=""/>
-              <a:defRPr sz="1200" kern="1200">
-                <a:solidFill>
-                  <a:schemeClr val="tx1">
-                    <a:lumMod val="75000"/>
-                    <a:lumOff val="25000"/>
-                  </a:schemeClr>
-                </a:solidFill>
-                <a:latin typeface="+mn-lt"/>
-                <a:ea typeface="+mn-ea"/>
-                <a:cs typeface="+mn-cs"/>
-              </a:defRPr>
-            </a:lvl4pPr>
-            <a:lvl5pPr marL="2057400" indent="-228600" algn="l" defTabSz="457200" rtl="0" eaLnBrk="1" latinLnBrk="0" hangingPunct="1">
-              <a:spcBef>
-                <a:spcPts val="1000"/>
-              </a:spcBef>
-              <a:spcAft>
-                <a:spcPts val="0"/>
-              </a:spcAft>
-              <a:buClr>
-                <a:schemeClr val="accent1"/>
-              </a:buClr>
-              <a:buSzPct val="80000"/>
-              <a:buFont typeface="Wingdings 3" charset="2"/>
-              <a:buChar char=""/>
-              <a:defRPr sz="1200" kern="1200">
-                <a:solidFill>
-                  <a:schemeClr val="tx1">
-                    <a:lumMod val="75000"/>
-                    <a:lumOff val="25000"/>
-                  </a:schemeClr>
-                </a:solidFill>
-                <a:latin typeface="+mn-lt"/>
-                <a:ea typeface="+mn-ea"/>
-                <a:cs typeface="+mn-cs"/>
-              </a:defRPr>
-            </a:lvl5pPr>
-            <a:lvl6pPr marL="2514600" indent="-228600" algn="l" defTabSz="457200" rtl="0" eaLnBrk="1" latinLnBrk="0" hangingPunct="1">
-              <a:spcBef>
-                <a:spcPts val="1000"/>
-              </a:spcBef>
-              <a:spcAft>
-                <a:spcPts val="0"/>
-              </a:spcAft>
-              <a:buClr>
-                <a:schemeClr val="accent1"/>
-              </a:buClr>
-              <a:buSzPct val="80000"/>
-              <a:buFont typeface="Wingdings 3" charset="2"/>
-              <a:buChar char=""/>
-              <a:defRPr sz="1200" kern="1200">
-                <a:solidFill>
-                  <a:schemeClr val="tx1">
-                    <a:lumMod val="75000"/>
-                    <a:lumOff val="25000"/>
-                  </a:schemeClr>
-                </a:solidFill>
-                <a:latin typeface="+mn-lt"/>
-                <a:ea typeface="+mn-ea"/>
-                <a:cs typeface="+mn-cs"/>
-              </a:defRPr>
-            </a:lvl6pPr>
-            <a:lvl7pPr marL="2971800" indent="-228600" algn="l" defTabSz="457200" rtl="0" eaLnBrk="1" latinLnBrk="0" hangingPunct="1">
-              <a:spcBef>
-                <a:spcPts val="1000"/>
-              </a:spcBef>
-              <a:spcAft>
-                <a:spcPts val="0"/>
-              </a:spcAft>
-              <a:buClr>
-                <a:schemeClr val="accent1"/>
-              </a:buClr>
-              <a:buSzPct val="80000"/>
-              <a:buFont typeface="Wingdings 3" charset="2"/>
-              <a:buChar char=""/>
-              <a:defRPr sz="1200" kern="1200">
-                <a:solidFill>
-                  <a:schemeClr val="tx1">
-                    <a:lumMod val="75000"/>
-                    <a:lumOff val="25000"/>
-                  </a:schemeClr>
-                </a:solidFill>
-                <a:latin typeface="+mn-lt"/>
-                <a:ea typeface="+mn-ea"/>
-                <a:cs typeface="+mn-cs"/>
-              </a:defRPr>
-            </a:lvl7pPr>
-            <a:lvl8pPr marL="3429000" indent="-228600" algn="l" defTabSz="457200" rtl="0" eaLnBrk="1" latinLnBrk="0" hangingPunct="1">
-              <a:spcBef>
-                <a:spcPts val="1000"/>
-              </a:spcBef>
-              <a:spcAft>
-                <a:spcPts val="0"/>
-              </a:spcAft>
-              <a:buClr>
-                <a:schemeClr val="accent1"/>
-              </a:buClr>
-              <a:buSzPct val="80000"/>
-              <a:buFont typeface="Wingdings 3" charset="2"/>
-              <a:buChar char=""/>
-              <a:defRPr sz="1200" kern="1200">
-                <a:solidFill>
-                  <a:schemeClr val="tx1">
-                    <a:lumMod val="75000"/>
-                    <a:lumOff val="25000"/>
-                  </a:schemeClr>
-                </a:solidFill>
-                <a:latin typeface="+mn-lt"/>
-                <a:ea typeface="+mn-ea"/>
-                <a:cs typeface="+mn-cs"/>
-              </a:defRPr>
-            </a:lvl8pPr>
-            <a:lvl9pPr marL="3886200" indent="-228600" algn="l" defTabSz="457200" rtl="0" eaLnBrk="1" latinLnBrk="0" hangingPunct="1">
-              <a:spcBef>
-                <a:spcPts val="1000"/>
-              </a:spcBef>
-              <a:spcAft>
-                <a:spcPts val="0"/>
-              </a:spcAft>
-              <a:buClr>
-                <a:schemeClr val="accent1"/>
-              </a:buClr>
-              <a:buSzPct val="80000"/>
-              <a:buFont typeface="Wingdings 3" charset="2"/>
-              <a:buChar char=""/>
-              <a:defRPr sz="1200" kern="1200">
-                <a:solidFill>
-                  <a:schemeClr val="tx1">
-                    <a:lumMod val="75000"/>
-                    <a:lumOff val="25000"/>
-                  </a:schemeClr>
-                </a:solidFill>
-                <a:latin typeface="+mn-lt"/>
-                <a:ea typeface="+mn-ea"/>
-                <a:cs typeface="+mn-cs"/>
-              </a:defRPr>
-            </a:lvl9pPr>
-          </a:lstStyle>
-          <a:p>
-            <a:endParaRPr lang="en-GB" sz="2000" dirty="0"/>
-          </a:p>
-        </p:txBody>
-      </p:sp>
-      <p:pic>
-        <p:nvPicPr>
-          <p:cNvPr id="3" name="Picture 2" descr="The diagram is a scatter plot showing a positive correlation between the amount of fertilizer used per hectare (kg/ha) and the resulting crop yield (Tonnes/Ha).&#10;&#10;AI-generated content may be incorrect.">
-            <a:extLst>
-              <a:ext uri="{FF2B5EF4-FFF2-40B4-BE49-F238E27FC236}">
-                <a16:creationId xmlns:a16="http://schemas.microsoft.com/office/drawing/2014/main" id="{1A035274-ED29-5F5F-84C1-CB7F01045C4B}"/>
-              </a:ext>
-            </a:extLst>
-          </p:cNvPr>
-          <p:cNvPicPr>
-            <a:picLocks noChangeAspect="1"/>
-          </p:cNvPicPr>
-          <p:nvPr/>
-        </p:nvPicPr>
-        <p:blipFill>
-          <a:blip r:embed="rId3"/>
-          <a:stretch>
-            <a:fillRect/>
-          </a:stretch>
-        </p:blipFill>
-        <p:spPr>
-          <a:xfrm>
-            <a:off x="72188" y="1832328"/>
-            <a:ext cx="6296209" cy="4639591"/>
-          </a:xfrm>
-          <a:prstGeom prst="rect">
-            <a:avLst/>
-          </a:prstGeom>
-        </p:spPr>
-      </p:pic>
-      <p:pic>
-        <p:nvPicPr>
-          <p:cNvPr id="10" name="Picture 9" descr="The image is a scatter plot showing a negative correlation between the amount of pesticide used (in litres per hectare) and crop yield (in tonnes per hectare).&#10;&#10;AI-generated content may be incorrect.">
-            <a:extLst>
-              <a:ext uri="{FF2B5EF4-FFF2-40B4-BE49-F238E27FC236}">
-                <a16:creationId xmlns:a16="http://schemas.microsoft.com/office/drawing/2014/main" id="{CB19AC85-BA4E-02B1-C756-609E8CDE18E4}"/>
-              </a:ext>
-            </a:extLst>
-          </p:cNvPr>
-          <p:cNvPicPr>
-            <a:picLocks noChangeAspect="1"/>
-          </p:cNvPicPr>
-          <p:nvPr/>
-        </p:nvPicPr>
-        <p:blipFill>
-          <a:blip r:embed="rId4"/>
-          <a:stretch>
-            <a:fillRect/>
-          </a:stretch>
-        </p:blipFill>
-        <p:spPr>
-          <a:xfrm>
-            <a:off x="6222353" y="1693716"/>
-            <a:ext cx="5969647" cy="4586057"/>
-          </a:xfrm>
-          <a:prstGeom prst="rect">
-            <a:avLst/>
-          </a:prstGeom>
-        </p:spPr>
-      </p:pic>
-    </p:spTree>
-    <p:extLst>
-      <p:ext uri="{BB962C8B-B14F-4D97-AF65-F5344CB8AC3E}">
-        <p14:creationId xmlns:p14="http://schemas.microsoft.com/office/powerpoint/2010/main" val="3071934001"/>
-      </p:ext>
-    </p:extLst>
-  </p:cSld>
-  <p:clrMapOvr>
-    <a:masterClrMapping/>
-  </p:clrMapOvr>
-  <p:timing>
-    <p:tnLst>
-      <p:par>
-        <p:cTn id="1" dur="indefinite" restart="never" nodeType="tmRoot">
-          <p:childTnLst>
-            <p:seq concurrent="1" nextAc="seek">
-              <p:cTn id="2" dur="indefinite" nodeType="mainSeq">
-                <p:childTnLst>
-                  <p:par>
-                    <p:cTn id="3" fill="hold">
-                      <p:stCondLst>
-                        <p:cond delay="indefinite"/>
-                      </p:stCondLst>
-                      <p:childTnLst>
-                        <p:par>
-                          <p:cTn id="4" fill="hold">
-                            <p:stCondLst>
-                              <p:cond delay="0"/>
-                            </p:stCondLst>
-                            <p:childTnLst>
-                              <p:par>
-                                <p:cTn id="5" presetID="53" presetClass="entr" presetSubtype="16" fill="hold" grpId="0" nodeType="clickEffect">
-                                  <p:stCondLst>
-                                    <p:cond delay="0"/>
-                                  </p:stCondLst>
-                                  <p:childTnLst>
-                                    <p:set>
-                                      <p:cBhvr>
-                                        <p:cTn id="6" dur="1" fill="hold">
-                                          <p:stCondLst>
-                                            <p:cond delay="0"/>
-                                          </p:stCondLst>
-                                        </p:cTn>
-                                        <p:tgtEl>
-                                          <p:spTgt spid="4"/>
-                                        </p:tgtEl>
-                                        <p:attrNameLst>
-                                          <p:attrName>style.visibility</p:attrName>
-                                        </p:attrNameLst>
-                                      </p:cBhvr>
-                                      <p:to>
-                                        <p:strVal val="visible"/>
-                                      </p:to>
-                                    </p:set>
-                                    <p:anim calcmode="lin" valueType="num">
-                                      <p:cBhvr>
-                                        <p:cTn id="7" dur="500" fill="hold"/>
-                                        <p:tgtEl>
-                                          <p:spTgt spid="4"/>
-                                        </p:tgtEl>
-                                        <p:attrNameLst>
-                                          <p:attrName>ppt_w</p:attrName>
-                                        </p:attrNameLst>
-                                      </p:cBhvr>
-                                      <p:tavLst>
-                                        <p:tav tm="0">
-                                          <p:val>
-                                            <p:fltVal val="0"/>
-                                          </p:val>
-                                        </p:tav>
-                                        <p:tav tm="100000">
-                                          <p:val>
-                                            <p:strVal val="#ppt_w"/>
-                                          </p:val>
-                                        </p:tav>
-                                      </p:tavLst>
-                                    </p:anim>
-                                    <p:anim calcmode="lin" valueType="num">
-                                      <p:cBhvr>
-                                        <p:cTn id="8" dur="500" fill="hold"/>
-                                        <p:tgtEl>
-                                          <p:spTgt spid="4"/>
-                                        </p:tgtEl>
-                                        <p:attrNameLst>
-                                          <p:attrName>ppt_h</p:attrName>
-                                        </p:attrNameLst>
-                                      </p:cBhvr>
-                                      <p:tavLst>
-                                        <p:tav tm="0">
-                                          <p:val>
-                                            <p:fltVal val="0"/>
-                                          </p:val>
-                                        </p:tav>
-                                        <p:tav tm="100000">
-                                          <p:val>
-                                            <p:strVal val="#ppt_h"/>
-                                          </p:val>
-                                        </p:tav>
-                                      </p:tavLst>
-                                    </p:anim>
-                                    <p:animEffect transition="in" filter="fade">
-                                      <p:cBhvr>
-                                        <p:cTn id="9" dur="500"/>
-                                        <p:tgtEl>
-                                          <p:spTgt spid="4"/>
-                                        </p:tgtEl>
-                                      </p:cBhvr>
-                                    </p:animEffect>
-                                  </p:childTnLst>
-                                </p:cTn>
-                              </p:par>
-                            </p:childTnLst>
-                          </p:cTn>
-                        </p:par>
-                      </p:childTnLst>
-                    </p:cTn>
-                  </p:par>
-                  <p:par>
-                    <p:cTn id="10" fill="hold">
-                      <p:stCondLst>
-                        <p:cond delay="indefinite"/>
-                      </p:stCondLst>
-                      <p:childTnLst>
-                        <p:par>
-                          <p:cTn id="11" fill="hold">
-                            <p:stCondLst>
-                              <p:cond delay="0"/>
-                            </p:stCondLst>
-                            <p:childTnLst>
-                              <p:par>
-                                <p:cTn id="12" presetID="42" presetClass="entr" presetSubtype="0" fill="hold" grpId="0" nodeType="clickEffect" nodePh="1">
-                                  <p:stCondLst>
-                                    <p:cond delay="0"/>
-                                  </p:stCondLst>
-                                  <p:endCondLst>
-                                    <p:cond evt="begin" delay="0">
-                                      <p:tn val="12"/>
-                                    </p:cond>
-                                  </p:endCondLst>
-                                  <p:childTnLst>
-                                    <p:set>
-                                      <p:cBhvr>
-                                        <p:cTn id="13" dur="1" fill="hold">
-                                          <p:stCondLst>
-                                            <p:cond delay="0"/>
-                                          </p:stCondLst>
-                                        </p:cTn>
-                                        <p:tgtEl>
-                                          <p:spTgt spid="7"/>
-                                        </p:tgtEl>
-                                        <p:attrNameLst>
-                                          <p:attrName>style.visibility</p:attrName>
-                                        </p:attrNameLst>
-                                      </p:cBhvr>
-                                      <p:to>
-                                        <p:strVal val="visible"/>
-                                      </p:to>
-                                    </p:set>
-                                    <p:animEffect transition="in" filter="fade">
-                                      <p:cBhvr>
-                                        <p:cTn id="14" dur="1000"/>
-                                        <p:tgtEl>
-                                          <p:spTgt spid="7"/>
-                                        </p:tgtEl>
-                                      </p:cBhvr>
-                                    </p:animEffect>
-                                    <p:anim calcmode="lin" valueType="num">
-                                      <p:cBhvr>
-                                        <p:cTn id="15" dur="1000" fill="hold"/>
-                                        <p:tgtEl>
-                                          <p:spTgt spid="7"/>
-                                        </p:tgtEl>
-                                        <p:attrNameLst>
-                                          <p:attrName>ppt_x</p:attrName>
-                                        </p:attrNameLst>
-                                      </p:cBhvr>
-                                      <p:tavLst>
-                                        <p:tav tm="0">
-                                          <p:val>
-                                            <p:strVal val="#ppt_x"/>
-                                          </p:val>
-                                        </p:tav>
-                                        <p:tav tm="100000">
-                                          <p:val>
-                                            <p:strVal val="#ppt_x"/>
-                                          </p:val>
-                                        </p:tav>
-                                      </p:tavLst>
-                                    </p:anim>
-                                    <p:anim calcmode="lin" valueType="num">
-                                      <p:cBhvr>
-                                        <p:cTn id="16" dur="1000" fill="hold"/>
-                                        <p:tgtEl>
-                                          <p:spTgt spid="7"/>
-                                        </p:tgtEl>
-                                        <p:attrNameLst>
-                                          <p:attrName>ppt_y</p:attrName>
-                                        </p:attrNameLst>
-                                      </p:cBhvr>
-                                      <p:tavLst>
-                                        <p:tav tm="0">
-                                          <p:val>
-                                            <p:strVal val="#ppt_y+.1"/>
-                                          </p:val>
-                                        </p:tav>
-                                        <p:tav tm="100000">
-                                          <p:val>
-                                            <p:strVal val="#ppt_y"/>
-                                          </p:val>
-                                        </p:tav>
-                                      </p:tavLst>
-                                    </p:anim>
-                                  </p:childTnLst>
-                                </p:cTn>
-                              </p:par>
-                            </p:childTnLst>
-                          </p:cTn>
-                        </p:par>
-                      </p:childTnLst>
-                    </p:cTn>
-                  </p:par>
-                  <p:par>
-                    <p:cTn id="17" fill="hold">
-                      <p:stCondLst>
-                        <p:cond delay="indefinite"/>
-                      </p:stCondLst>
-                      <p:childTnLst>
-                        <p:par>
-                          <p:cTn id="18" fill="hold">
-                            <p:stCondLst>
-                              <p:cond delay="0"/>
-                            </p:stCondLst>
-                            <p:childTnLst>
-                              <p:par>
-                                <p:cTn id="19" presetID="42" presetClass="entr" presetSubtype="0" fill="hold" grpId="0" nodeType="clickEffect" nodePh="1">
-                                  <p:stCondLst>
-                                    <p:cond delay="0"/>
-                                  </p:stCondLst>
-                                  <p:endCondLst>
-                                    <p:cond evt="begin" delay="0">
-                                      <p:tn val="19"/>
-                                    </p:cond>
-                                  </p:endCondLst>
-                                  <p:childTnLst>
-                                    <p:set>
-                                      <p:cBhvr>
-                                        <p:cTn id="20" dur="1" fill="hold">
-                                          <p:stCondLst>
-                                            <p:cond delay="0"/>
-                                          </p:stCondLst>
-                                        </p:cTn>
-                                        <p:tgtEl>
-                                          <p:spTgt spid="8"/>
-                                        </p:tgtEl>
-                                        <p:attrNameLst>
-                                          <p:attrName>style.visibility</p:attrName>
-                                        </p:attrNameLst>
-                                      </p:cBhvr>
-                                      <p:to>
-                                        <p:strVal val="visible"/>
-                                      </p:to>
-                                    </p:set>
-                                    <p:animEffect transition="in" filter="fade">
-                                      <p:cBhvr>
-                                        <p:cTn id="21" dur="1000"/>
-                                        <p:tgtEl>
-                                          <p:spTgt spid="8"/>
-                                        </p:tgtEl>
-                                      </p:cBhvr>
-                                    </p:animEffect>
-                                    <p:anim calcmode="lin" valueType="num">
-                                      <p:cBhvr>
-                                        <p:cTn id="22" dur="1000" fill="hold"/>
-                                        <p:tgtEl>
-                                          <p:spTgt spid="8"/>
-                                        </p:tgtEl>
-                                        <p:attrNameLst>
-                                          <p:attrName>ppt_x</p:attrName>
-                                        </p:attrNameLst>
-                                      </p:cBhvr>
-                                      <p:tavLst>
-                                        <p:tav tm="0">
-                                          <p:val>
-                                            <p:strVal val="#ppt_x"/>
-                                          </p:val>
-                                        </p:tav>
-                                        <p:tav tm="100000">
-                                          <p:val>
-                                            <p:strVal val="#ppt_x"/>
-                                          </p:val>
-                                        </p:tav>
-                                      </p:tavLst>
-                                    </p:anim>
-                                    <p:anim calcmode="lin" valueType="num">
-                                      <p:cBhvr>
-                                        <p:cTn id="23" dur="1000" fill="hold"/>
-                                        <p:tgtEl>
-                                          <p:spTgt spid="8"/>
-                                        </p:tgtEl>
-                                        <p:attrNameLst>
-                                          <p:attrName>ppt_y</p:attrName>
-                                        </p:attrNameLst>
-                                      </p:cBhvr>
-                                      <p:tavLst>
-                                        <p:tav tm="0">
-                                          <p:val>
-                                            <p:strVal val="#ppt_y+.1"/>
-                                          </p:val>
-                                        </p:tav>
-                                        <p:tav tm="100000">
-                                          <p:val>
-                                            <p:strVal val="#ppt_y"/>
-                                          </p:val>
-                                        </p:tav>
-                                      </p:tavLst>
-                                    </p:anim>
-                                  </p:childTnLst>
-                                </p:cTn>
-                              </p:par>
-                            </p:childTnLst>
-                          </p:cTn>
-                        </p:par>
-                      </p:childTnLst>
-                    </p:cTn>
-                  </p:par>
-                </p:childTnLst>
-              </p:cTn>
-              <p:prevCondLst>
-                <p:cond evt="onPrev" delay="0">
-                  <p:tgtEl>
-                    <p:sldTgt/>
-                  </p:tgtEl>
-                </p:cond>
-              </p:prevCondLst>
-              <p:nextCondLst>
-                <p:cond evt="onNext" delay="0">
-                  <p:tgtEl>
-                    <p:sldTgt/>
-                  </p:tgtEl>
-                </p:cond>
-              </p:nextCondLst>
-            </p:seq>
-          </p:childTnLst>
-        </p:cTn>
-      </p:par>
-    </p:tnLst>
-    <p:bldLst>
-      <p:bldP spid="4" grpId="0"/>
-      <p:bldP spid="7" grpId="0"/>
-      <p:bldP spid="8" grpId="0"/>
-    </p:bldLst>
-  </p:timing>
-</p:sld>
-</file>
-
-<file path=ppt/slides/slide14.xml><?xml version="1.0" encoding="utf-8"?>
-<p:sld xmlns:a="http://schemas.openxmlformats.org/drawingml/2006/main" xmlns:r="http://schemas.openxmlformats.org/officeDocument/2006/relationships" xmlns:p="http://schemas.openxmlformats.org/presentationml/2006/main">
-  <p:cSld>
-    <p:spTree>
-      <p:nvGrpSpPr>
-        <p:cNvPr id="1" name="">
-          <a:extLst>
-            <a:ext uri="{FF2B5EF4-FFF2-40B4-BE49-F238E27FC236}">
-              <a16:creationId xmlns:a16="http://schemas.microsoft.com/office/drawing/2014/main" id="{9BC010F9-3566-16A2-8017-9A6F4C2599B6}"/>
-            </a:ext>
-          </a:extLst>
-        </p:cNvPr>
-        <p:cNvGrpSpPr/>
-        <p:nvPr/>
-      </p:nvGrpSpPr>
-      <p:grpSpPr>
-        <a:xfrm>
-          <a:off x="0" y="0"/>
-          <a:ext cx="0" cy="0"/>
-          <a:chOff x="0" y="0"/>
-          <a:chExt cx="0" cy="0"/>
-        </a:xfrm>
-      </p:grpSpPr>
-      <p:pic>
-        <p:nvPicPr>
-          <p:cNvPr id="5" name="Picture 4">
-            <a:extLst>
-              <a:ext uri="{FF2B5EF4-FFF2-40B4-BE49-F238E27FC236}">
-                <a16:creationId xmlns:a16="http://schemas.microsoft.com/office/drawing/2014/main" id="{9FEFAC6C-E726-1629-014D-0820B270592D}"/>
-              </a:ext>
-            </a:extLst>
-          </p:cNvPr>
-          <p:cNvPicPr>
-            <a:picLocks noChangeAspect="1"/>
-          </p:cNvPicPr>
-          <p:nvPr/>
-        </p:nvPicPr>
-        <p:blipFill rotWithShape="1">
-          <a:blip r:embed="rId2"/>
-          <a:srcRect t="96181"/>
-          <a:stretch/>
-        </p:blipFill>
-        <p:spPr>
-          <a:xfrm>
-            <a:off x="675957" y="6471920"/>
-            <a:ext cx="2143125" cy="193040"/>
-          </a:xfrm>
-          <a:prstGeom prst="rect">
-            <a:avLst/>
-          </a:prstGeom>
-        </p:spPr>
-      </p:pic>
-      <p:sp>
-        <p:nvSpPr>
-          <p:cNvPr id="4" name="Title 3">
-            <a:extLst>
-              <a:ext uri="{FF2B5EF4-FFF2-40B4-BE49-F238E27FC236}">
-                <a16:creationId xmlns:a16="http://schemas.microsoft.com/office/drawing/2014/main" id="{750DF2C4-254B-DDEB-49F2-AB1C2E5AF45A}"/>
-              </a:ext>
-            </a:extLst>
-          </p:cNvPr>
-          <p:cNvSpPr>
-            <a:spLocks noGrp="1"/>
-          </p:cNvSpPr>
-          <p:nvPr>
-            <p:ph type="title"/>
-          </p:nvPr>
-        </p:nvSpPr>
-        <p:spPr>
-          <a:xfrm>
-            <a:off x="740125" y="155140"/>
-            <a:ext cx="2981643" cy="830997"/>
-          </a:xfrm>
-        </p:spPr>
-        <p:txBody>
-          <a:bodyPr>
-            <a:normAutofit/>
-          </a:bodyPr>
-          <a:lstStyle/>
-          <a:p>
-            <a:r>
-              <a:rPr lang="en-GB" dirty="0"/>
-              <a:t>RESULTS </a:t>
-            </a:r>
-            <a:endParaRPr lang="en-IN" dirty="0"/>
-          </a:p>
-        </p:txBody>
-      </p:sp>
-      <p:sp>
-        <p:nvSpPr>
-          <p:cNvPr id="7" name="Text Placeholder 30">
-            <a:extLst>
-              <a:ext uri="{FF2B5EF4-FFF2-40B4-BE49-F238E27FC236}">
-                <a16:creationId xmlns:a16="http://schemas.microsoft.com/office/drawing/2014/main" id="{DD75E655-2B20-E6A7-C7B6-BBE99CD6193C}"/>
-              </a:ext>
-            </a:extLst>
-          </p:cNvPr>
-          <p:cNvSpPr txBox="1">
-            <a:spLocks/>
-          </p:cNvSpPr>
-          <p:nvPr/>
-        </p:nvSpPr>
-        <p:spPr>
-          <a:xfrm>
-            <a:off x="320982" y="1275371"/>
-            <a:ext cx="3343561" cy="666078"/>
-          </a:xfrm>
-          <a:prstGeom prst="rect">
-            <a:avLst/>
-          </a:prstGeom>
-        </p:spPr>
-        <p:txBody>
-          <a:bodyPr vert="horz" lIns="91440" tIns="45720" rIns="91440" bIns="45720" rtlCol="0">
-            <a:normAutofit/>
-          </a:bodyPr>
-          <a:lstStyle>
-            <a:lvl1pPr marL="0" indent="0" algn="ctr" defTabSz="457200" rtl="0" eaLnBrk="1" latinLnBrk="0" hangingPunct="1">
-              <a:spcBef>
-                <a:spcPts val="1000"/>
-              </a:spcBef>
-              <a:spcAft>
-                <a:spcPts val="0"/>
-              </a:spcAft>
-              <a:buClr>
-                <a:schemeClr val="accent1"/>
-              </a:buClr>
-              <a:buSzPct val="80000"/>
-              <a:buFont typeface="Wingdings 3" charset="2"/>
-              <a:buNone/>
-              <a:defRPr lang="en-US" sz="1600" kern="1200" dirty="0" smtClean="0">
-                <a:solidFill>
-                  <a:schemeClr val="tx1"/>
-                </a:solidFill>
-                <a:latin typeface="+mn-lt"/>
-                <a:ea typeface="+mn-ea"/>
-                <a:cs typeface="+mn-cs"/>
-              </a:defRPr>
-            </a:lvl1pPr>
-            <a:lvl2pPr marL="742950" indent="-285750" algn="l" defTabSz="457200" rtl="0" eaLnBrk="1" latinLnBrk="0" hangingPunct="1">
-              <a:spcBef>
-                <a:spcPts val="1000"/>
-              </a:spcBef>
-              <a:spcAft>
-                <a:spcPts val="0"/>
-              </a:spcAft>
-              <a:buClr>
-                <a:schemeClr val="accent1"/>
-              </a:buClr>
-              <a:buSzPct val="80000"/>
-              <a:buFont typeface="Wingdings 3" charset="2"/>
-              <a:buChar char=""/>
-              <a:defRPr sz="1600" kern="1200">
-                <a:solidFill>
-                  <a:schemeClr val="tx1">
-                    <a:lumMod val="75000"/>
-                    <a:lumOff val="25000"/>
-                  </a:schemeClr>
-                </a:solidFill>
-                <a:latin typeface="+mn-lt"/>
-                <a:ea typeface="+mn-ea"/>
-                <a:cs typeface="+mn-cs"/>
-              </a:defRPr>
-            </a:lvl2pPr>
-            <a:lvl3pPr marL="1143000" indent="-228600" algn="l" defTabSz="457200" rtl="0" eaLnBrk="1" latinLnBrk="0" hangingPunct="1">
-              <a:spcBef>
-                <a:spcPts val="1000"/>
-              </a:spcBef>
-              <a:spcAft>
-                <a:spcPts val="0"/>
-              </a:spcAft>
-              <a:buClr>
-                <a:schemeClr val="accent1"/>
-              </a:buClr>
-              <a:buSzPct val="80000"/>
-              <a:buFont typeface="Wingdings 3" charset="2"/>
-              <a:buChar char=""/>
-              <a:defRPr sz="1400" kern="1200">
-                <a:solidFill>
-                  <a:schemeClr val="tx1">
-                    <a:lumMod val="75000"/>
-                    <a:lumOff val="25000"/>
-                  </a:schemeClr>
-                </a:solidFill>
-                <a:latin typeface="+mn-lt"/>
-                <a:ea typeface="+mn-ea"/>
-                <a:cs typeface="+mn-cs"/>
-              </a:defRPr>
-            </a:lvl3pPr>
-            <a:lvl4pPr marL="1600200" indent="-228600" algn="l" defTabSz="457200" rtl="0" eaLnBrk="1" latinLnBrk="0" hangingPunct="1">
-              <a:spcBef>
-                <a:spcPts val="1000"/>
-              </a:spcBef>
-              <a:spcAft>
-                <a:spcPts val="0"/>
-              </a:spcAft>
-              <a:buClr>
-                <a:schemeClr val="accent1"/>
-              </a:buClr>
-              <a:buSzPct val="80000"/>
-              <a:buFont typeface="Wingdings 3" charset="2"/>
-              <a:buChar char=""/>
-              <a:defRPr sz="1200" kern="1200">
-                <a:solidFill>
-                  <a:schemeClr val="tx1">
-                    <a:lumMod val="75000"/>
-                    <a:lumOff val="25000"/>
-                  </a:schemeClr>
-                </a:solidFill>
-                <a:latin typeface="+mn-lt"/>
-                <a:ea typeface="+mn-ea"/>
-                <a:cs typeface="+mn-cs"/>
-              </a:defRPr>
-            </a:lvl4pPr>
-            <a:lvl5pPr marL="2057400" indent="-228600" algn="l" defTabSz="457200" rtl="0" eaLnBrk="1" latinLnBrk="0" hangingPunct="1">
-              <a:spcBef>
-                <a:spcPts val="1000"/>
-              </a:spcBef>
-              <a:spcAft>
-                <a:spcPts val="0"/>
-              </a:spcAft>
-              <a:buClr>
-                <a:schemeClr val="accent1"/>
-              </a:buClr>
-              <a:buSzPct val="80000"/>
-              <a:buFont typeface="Wingdings 3" charset="2"/>
-              <a:buChar char=""/>
-              <a:defRPr sz="1200" kern="1200">
-                <a:solidFill>
-                  <a:schemeClr val="tx1">
-                    <a:lumMod val="75000"/>
-                    <a:lumOff val="25000"/>
-                  </a:schemeClr>
-                </a:solidFill>
-                <a:latin typeface="+mn-lt"/>
-                <a:ea typeface="+mn-ea"/>
-                <a:cs typeface="+mn-cs"/>
-              </a:defRPr>
-            </a:lvl5pPr>
-            <a:lvl6pPr marL="2514600" indent="-228600" algn="l" defTabSz="457200" rtl="0" eaLnBrk="1" latinLnBrk="0" hangingPunct="1">
-              <a:spcBef>
-                <a:spcPts val="1000"/>
-              </a:spcBef>
-              <a:spcAft>
-                <a:spcPts val="0"/>
-              </a:spcAft>
-              <a:buClr>
-                <a:schemeClr val="accent1"/>
-              </a:buClr>
-              <a:buSzPct val="80000"/>
-              <a:buFont typeface="Wingdings 3" charset="2"/>
-              <a:buChar char=""/>
-              <a:defRPr sz="1200" kern="1200">
-                <a:solidFill>
-                  <a:schemeClr val="tx1">
-                    <a:lumMod val="75000"/>
-                    <a:lumOff val="25000"/>
-                  </a:schemeClr>
-                </a:solidFill>
-                <a:latin typeface="+mn-lt"/>
-                <a:ea typeface="+mn-ea"/>
-                <a:cs typeface="+mn-cs"/>
-              </a:defRPr>
-            </a:lvl6pPr>
-            <a:lvl7pPr marL="2971800" indent="-228600" algn="l" defTabSz="457200" rtl="0" eaLnBrk="1" latinLnBrk="0" hangingPunct="1">
-              <a:spcBef>
-                <a:spcPts val="1000"/>
-              </a:spcBef>
-              <a:spcAft>
-                <a:spcPts val="0"/>
-              </a:spcAft>
-              <a:buClr>
-                <a:schemeClr val="accent1"/>
-              </a:buClr>
-              <a:buSzPct val="80000"/>
-              <a:buFont typeface="Wingdings 3" charset="2"/>
-              <a:buChar char=""/>
-              <a:defRPr sz="1200" kern="1200">
-                <a:solidFill>
-                  <a:schemeClr val="tx1">
-                    <a:lumMod val="75000"/>
-                    <a:lumOff val="25000"/>
-                  </a:schemeClr>
-                </a:solidFill>
-                <a:latin typeface="+mn-lt"/>
-                <a:ea typeface="+mn-ea"/>
-                <a:cs typeface="+mn-cs"/>
-              </a:defRPr>
-            </a:lvl7pPr>
-            <a:lvl8pPr marL="3429000" indent="-228600" algn="l" defTabSz="457200" rtl="0" eaLnBrk="1" latinLnBrk="0" hangingPunct="1">
-              <a:spcBef>
-                <a:spcPts val="1000"/>
-              </a:spcBef>
-              <a:spcAft>
-                <a:spcPts val="0"/>
-              </a:spcAft>
-              <a:buClr>
-                <a:schemeClr val="accent1"/>
-              </a:buClr>
-              <a:buSzPct val="80000"/>
-              <a:buFont typeface="Wingdings 3" charset="2"/>
-              <a:buChar char=""/>
-              <a:defRPr sz="1200" kern="1200">
-                <a:solidFill>
-                  <a:schemeClr val="tx1">
-                    <a:lumMod val="75000"/>
-                    <a:lumOff val="25000"/>
-                  </a:schemeClr>
-                </a:solidFill>
-                <a:latin typeface="+mn-lt"/>
-                <a:ea typeface="+mn-ea"/>
-                <a:cs typeface="+mn-cs"/>
-              </a:defRPr>
-            </a:lvl8pPr>
-            <a:lvl9pPr marL="3886200" indent="-228600" algn="l" defTabSz="457200" rtl="0" eaLnBrk="1" latinLnBrk="0" hangingPunct="1">
-              <a:spcBef>
-                <a:spcPts val="1000"/>
-              </a:spcBef>
-              <a:spcAft>
-                <a:spcPts val="0"/>
-              </a:spcAft>
-              <a:buClr>
-                <a:schemeClr val="accent1"/>
-              </a:buClr>
-              <a:buSzPct val="80000"/>
-              <a:buFont typeface="Wingdings 3" charset="2"/>
-              <a:buChar char=""/>
-              <a:defRPr sz="1200" kern="1200">
-                <a:solidFill>
-                  <a:schemeClr val="tx1">
-                    <a:lumMod val="75000"/>
-                    <a:lumOff val="25000"/>
-                  </a:schemeClr>
-                </a:solidFill>
-                <a:latin typeface="+mn-lt"/>
-                <a:ea typeface="+mn-ea"/>
-                <a:cs typeface="+mn-cs"/>
-              </a:defRPr>
-            </a:lvl9pPr>
-          </a:lstStyle>
-          <a:p>
-            <a:endParaRPr lang="en-GB" sz="2000" dirty="0"/>
-          </a:p>
-        </p:txBody>
-      </p:sp>
-      <p:sp>
-        <p:nvSpPr>
-          <p:cNvPr id="8" name="Text Placeholder 30">
-            <a:extLst>
-              <a:ext uri="{FF2B5EF4-FFF2-40B4-BE49-F238E27FC236}">
-                <a16:creationId xmlns:a16="http://schemas.microsoft.com/office/drawing/2014/main" id="{9F2950FA-C2DB-EC0C-81BC-11A35DE2784F}"/>
-              </a:ext>
-            </a:extLst>
-          </p:cNvPr>
-          <p:cNvSpPr txBox="1">
-            <a:spLocks/>
-          </p:cNvSpPr>
-          <p:nvPr/>
-        </p:nvSpPr>
-        <p:spPr>
-          <a:xfrm>
-            <a:off x="4345694" y="1275371"/>
-            <a:ext cx="3343561" cy="666078"/>
-          </a:xfrm>
-          <a:prstGeom prst="rect">
-            <a:avLst/>
-          </a:prstGeom>
-        </p:spPr>
-        <p:txBody>
-          <a:bodyPr vert="horz" lIns="91440" tIns="45720" rIns="91440" bIns="45720" rtlCol="0">
-            <a:normAutofit/>
-          </a:bodyPr>
-          <a:lstStyle>
-            <a:lvl1pPr marL="0" indent="0" algn="ctr" defTabSz="457200" rtl="0" eaLnBrk="1" latinLnBrk="0" hangingPunct="1">
-              <a:spcBef>
-                <a:spcPts val="1000"/>
-              </a:spcBef>
-              <a:spcAft>
-                <a:spcPts val="0"/>
-              </a:spcAft>
-              <a:buClr>
-                <a:schemeClr val="accent1"/>
-              </a:buClr>
-              <a:buSzPct val="80000"/>
-              <a:buFont typeface="Wingdings 3" charset="2"/>
-              <a:buNone/>
-              <a:defRPr lang="en-US" sz="1600" kern="1200" dirty="0" smtClean="0">
-                <a:solidFill>
-                  <a:schemeClr val="tx1"/>
-                </a:solidFill>
-                <a:latin typeface="+mn-lt"/>
-                <a:ea typeface="+mn-ea"/>
-                <a:cs typeface="+mn-cs"/>
-              </a:defRPr>
-            </a:lvl1pPr>
-            <a:lvl2pPr marL="742950" indent="-285750" algn="l" defTabSz="457200" rtl="0" eaLnBrk="1" latinLnBrk="0" hangingPunct="1">
-              <a:spcBef>
-                <a:spcPts val="1000"/>
-              </a:spcBef>
-              <a:spcAft>
-                <a:spcPts val="0"/>
-              </a:spcAft>
-              <a:buClr>
-                <a:schemeClr val="accent1"/>
-              </a:buClr>
-              <a:buSzPct val="80000"/>
-              <a:buFont typeface="Wingdings 3" charset="2"/>
-              <a:buChar char=""/>
-              <a:defRPr sz="1600" kern="1200">
-                <a:solidFill>
-                  <a:schemeClr val="tx1">
-                    <a:lumMod val="75000"/>
-                    <a:lumOff val="25000"/>
-                  </a:schemeClr>
-                </a:solidFill>
-                <a:latin typeface="+mn-lt"/>
-                <a:ea typeface="+mn-ea"/>
-                <a:cs typeface="+mn-cs"/>
-              </a:defRPr>
-            </a:lvl2pPr>
-            <a:lvl3pPr marL="1143000" indent="-228600" algn="l" defTabSz="457200" rtl="0" eaLnBrk="1" latinLnBrk="0" hangingPunct="1">
-              <a:spcBef>
-                <a:spcPts val="1000"/>
-              </a:spcBef>
-              <a:spcAft>
-                <a:spcPts val="0"/>
-              </a:spcAft>
-              <a:buClr>
-                <a:schemeClr val="accent1"/>
-              </a:buClr>
-              <a:buSzPct val="80000"/>
-              <a:buFont typeface="Wingdings 3" charset="2"/>
-              <a:buChar char=""/>
-              <a:defRPr sz="1400" kern="1200">
-                <a:solidFill>
-                  <a:schemeClr val="tx1">
-                    <a:lumMod val="75000"/>
-                    <a:lumOff val="25000"/>
-                  </a:schemeClr>
-                </a:solidFill>
-                <a:latin typeface="+mn-lt"/>
-                <a:ea typeface="+mn-ea"/>
-                <a:cs typeface="+mn-cs"/>
-              </a:defRPr>
-            </a:lvl3pPr>
-            <a:lvl4pPr marL="1600200" indent="-228600" algn="l" defTabSz="457200" rtl="0" eaLnBrk="1" latinLnBrk="0" hangingPunct="1">
-              <a:spcBef>
-                <a:spcPts val="1000"/>
-              </a:spcBef>
-              <a:spcAft>
-                <a:spcPts val="0"/>
-              </a:spcAft>
-              <a:buClr>
-                <a:schemeClr val="accent1"/>
-              </a:buClr>
-              <a:buSzPct val="80000"/>
-              <a:buFont typeface="Wingdings 3" charset="2"/>
-              <a:buChar char=""/>
-              <a:defRPr sz="1200" kern="1200">
-                <a:solidFill>
-                  <a:schemeClr val="tx1">
-                    <a:lumMod val="75000"/>
-                    <a:lumOff val="25000"/>
-                  </a:schemeClr>
-                </a:solidFill>
-                <a:latin typeface="+mn-lt"/>
-                <a:ea typeface="+mn-ea"/>
-                <a:cs typeface="+mn-cs"/>
-              </a:defRPr>
-            </a:lvl4pPr>
-            <a:lvl5pPr marL="2057400" indent="-228600" algn="l" defTabSz="457200" rtl="0" eaLnBrk="1" latinLnBrk="0" hangingPunct="1">
-              <a:spcBef>
-                <a:spcPts val="1000"/>
-              </a:spcBef>
-              <a:spcAft>
-                <a:spcPts val="0"/>
-              </a:spcAft>
-              <a:buClr>
-                <a:schemeClr val="accent1"/>
-              </a:buClr>
-              <a:buSzPct val="80000"/>
-              <a:buFont typeface="Wingdings 3" charset="2"/>
-              <a:buChar char=""/>
-              <a:defRPr sz="1200" kern="1200">
-                <a:solidFill>
-                  <a:schemeClr val="tx1">
-                    <a:lumMod val="75000"/>
-                    <a:lumOff val="25000"/>
-                  </a:schemeClr>
-                </a:solidFill>
-                <a:latin typeface="+mn-lt"/>
-                <a:ea typeface="+mn-ea"/>
-                <a:cs typeface="+mn-cs"/>
-              </a:defRPr>
-            </a:lvl5pPr>
-            <a:lvl6pPr marL="2514600" indent="-228600" algn="l" defTabSz="457200" rtl="0" eaLnBrk="1" latinLnBrk="0" hangingPunct="1">
-              <a:spcBef>
-                <a:spcPts val="1000"/>
-              </a:spcBef>
-              <a:spcAft>
-                <a:spcPts val="0"/>
-              </a:spcAft>
-              <a:buClr>
-                <a:schemeClr val="accent1"/>
-              </a:buClr>
-              <a:buSzPct val="80000"/>
-              <a:buFont typeface="Wingdings 3" charset="2"/>
-              <a:buChar char=""/>
-              <a:defRPr sz="1200" kern="1200">
-                <a:solidFill>
-                  <a:schemeClr val="tx1">
-                    <a:lumMod val="75000"/>
-                    <a:lumOff val="25000"/>
-                  </a:schemeClr>
-                </a:solidFill>
-                <a:latin typeface="+mn-lt"/>
-                <a:ea typeface="+mn-ea"/>
-                <a:cs typeface="+mn-cs"/>
-              </a:defRPr>
-            </a:lvl6pPr>
-            <a:lvl7pPr marL="2971800" indent="-228600" algn="l" defTabSz="457200" rtl="0" eaLnBrk="1" latinLnBrk="0" hangingPunct="1">
-              <a:spcBef>
-                <a:spcPts val="1000"/>
-              </a:spcBef>
-              <a:spcAft>
-                <a:spcPts val="0"/>
-              </a:spcAft>
-              <a:buClr>
-                <a:schemeClr val="accent1"/>
-              </a:buClr>
-              <a:buSzPct val="80000"/>
-              <a:buFont typeface="Wingdings 3" charset="2"/>
-              <a:buChar char=""/>
-              <a:defRPr sz="1200" kern="1200">
-                <a:solidFill>
-                  <a:schemeClr val="tx1">
-                    <a:lumMod val="75000"/>
-                    <a:lumOff val="25000"/>
-                  </a:schemeClr>
-                </a:solidFill>
-                <a:latin typeface="+mn-lt"/>
-                <a:ea typeface="+mn-ea"/>
-                <a:cs typeface="+mn-cs"/>
-              </a:defRPr>
-            </a:lvl7pPr>
-            <a:lvl8pPr marL="3429000" indent="-228600" algn="l" defTabSz="457200" rtl="0" eaLnBrk="1" latinLnBrk="0" hangingPunct="1">
-              <a:spcBef>
-                <a:spcPts val="1000"/>
-              </a:spcBef>
-              <a:spcAft>
-                <a:spcPts val="0"/>
-              </a:spcAft>
-              <a:buClr>
-                <a:schemeClr val="accent1"/>
-              </a:buClr>
-              <a:buSzPct val="80000"/>
-              <a:buFont typeface="Wingdings 3" charset="2"/>
-              <a:buChar char=""/>
-              <a:defRPr sz="1200" kern="1200">
-                <a:solidFill>
-                  <a:schemeClr val="tx1">
-                    <a:lumMod val="75000"/>
-                    <a:lumOff val="25000"/>
-                  </a:schemeClr>
-                </a:solidFill>
-                <a:latin typeface="+mn-lt"/>
-                <a:ea typeface="+mn-ea"/>
-                <a:cs typeface="+mn-cs"/>
-              </a:defRPr>
-            </a:lvl8pPr>
-            <a:lvl9pPr marL="3886200" indent="-228600" algn="l" defTabSz="457200" rtl="0" eaLnBrk="1" latinLnBrk="0" hangingPunct="1">
-              <a:spcBef>
-                <a:spcPts val="1000"/>
-              </a:spcBef>
-              <a:spcAft>
-                <a:spcPts val="0"/>
-              </a:spcAft>
-              <a:buClr>
-                <a:schemeClr val="accent1"/>
-              </a:buClr>
-              <a:buSzPct val="80000"/>
-              <a:buFont typeface="Wingdings 3" charset="2"/>
-              <a:buChar char=""/>
-              <a:defRPr sz="1200" kern="1200">
-                <a:solidFill>
-                  <a:schemeClr val="tx1">
-                    <a:lumMod val="75000"/>
-                    <a:lumOff val="25000"/>
-                  </a:schemeClr>
-                </a:solidFill>
-                <a:latin typeface="+mn-lt"/>
-                <a:ea typeface="+mn-ea"/>
-                <a:cs typeface="+mn-cs"/>
-              </a:defRPr>
-            </a:lvl9pPr>
-          </a:lstStyle>
-          <a:p>
-            <a:endParaRPr lang="en-GB" sz="2000" dirty="0"/>
-          </a:p>
-        </p:txBody>
-      </p:sp>
-      <p:pic>
-        <p:nvPicPr>
-          <p:cNvPr id="6" name="Picture 5" descr="This image is a scatter plot displaying a positive correlation between Seed Quality Score and Crop Yield, with the scores on the x-axis and tonnes per hectare on the y-axis.&#10;&#10;AI-generated content may be incorrect.">
-            <a:extLst>
-              <a:ext uri="{FF2B5EF4-FFF2-40B4-BE49-F238E27FC236}">
-                <a16:creationId xmlns:a16="http://schemas.microsoft.com/office/drawing/2014/main" id="{8966D140-5118-142D-5033-F7CF3877553E}"/>
-              </a:ext>
-            </a:extLst>
-          </p:cNvPr>
-          <p:cNvPicPr>
-            <a:picLocks noChangeAspect="1"/>
-          </p:cNvPicPr>
-          <p:nvPr/>
-        </p:nvPicPr>
-        <p:blipFill>
-          <a:blip r:embed="rId3"/>
-          <a:stretch>
-            <a:fillRect/>
-          </a:stretch>
-        </p:blipFill>
-        <p:spPr>
-          <a:xfrm>
-            <a:off x="0" y="2007975"/>
-            <a:ext cx="5756981" cy="4397418"/>
-          </a:xfrm>
-          <a:prstGeom prst="rect">
-            <a:avLst/>
-          </a:prstGeom>
-        </p:spPr>
-      </p:pic>
-      <p:pic>
-        <p:nvPicPr>
-          <p:cNvPr id="11" name="Picture 10" descr="The image is a box plot showing the distribution of crop yields (in tonnes per hectare) across different seasons (Kharif, Rabi, Zaid).&#10;&#10;AI-generated content may be incorrect.">
-            <a:extLst>
-              <a:ext uri="{FF2B5EF4-FFF2-40B4-BE49-F238E27FC236}">
-                <a16:creationId xmlns:a16="http://schemas.microsoft.com/office/drawing/2014/main" id="{8859F35E-FC40-B4E7-F195-AF48F91DD336}"/>
-              </a:ext>
-            </a:extLst>
-          </p:cNvPr>
-          <p:cNvPicPr>
-            <a:picLocks noChangeAspect="1"/>
-          </p:cNvPicPr>
-          <p:nvPr/>
-        </p:nvPicPr>
-        <p:blipFill>
-          <a:blip r:embed="rId4"/>
-          <a:stretch>
-            <a:fillRect/>
-          </a:stretch>
-        </p:blipFill>
-        <p:spPr>
-          <a:xfrm>
-            <a:off x="6095999" y="1796716"/>
-            <a:ext cx="6050510" cy="5061284"/>
-          </a:xfrm>
-          <a:prstGeom prst="rect">
-            <a:avLst/>
-          </a:prstGeom>
-        </p:spPr>
-      </p:pic>
-    </p:spTree>
-    <p:extLst>
-      <p:ext uri="{BB962C8B-B14F-4D97-AF65-F5344CB8AC3E}">
-        <p14:creationId xmlns:p14="http://schemas.microsoft.com/office/powerpoint/2010/main" val="3233854084"/>
-      </p:ext>
-    </p:extLst>
-  </p:cSld>
-  <p:clrMapOvr>
-    <a:masterClrMapping/>
-  </p:clrMapOvr>
-  <p:timing>
-    <p:tnLst>
-      <p:par>
-        <p:cTn id="1" dur="indefinite" restart="never" nodeType="tmRoot">
-          <p:childTnLst>
-            <p:seq concurrent="1" nextAc="seek">
-              <p:cTn id="2" dur="indefinite" nodeType="mainSeq">
-                <p:childTnLst>
-                  <p:par>
-                    <p:cTn id="3" fill="hold">
-                      <p:stCondLst>
-                        <p:cond delay="indefinite"/>
-                      </p:stCondLst>
-                      <p:childTnLst>
-                        <p:par>
-                          <p:cTn id="4" fill="hold">
-                            <p:stCondLst>
-                              <p:cond delay="0"/>
-                            </p:stCondLst>
-                            <p:childTnLst>
-                              <p:par>
-                                <p:cTn id="5" presetID="53" presetClass="entr" presetSubtype="16" fill="hold" grpId="0" nodeType="clickEffect">
-                                  <p:stCondLst>
-                                    <p:cond delay="0"/>
-                                  </p:stCondLst>
-                                  <p:childTnLst>
-                                    <p:set>
-                                      <p:cBhvr>
-                                        <p:cTn id="6" dur="1" fill="hold">
-                                          <p:stCondLst>
-                                            <p:cond delay="0"/>
-                                          </p:stCondLst>
-                                        </p:cTn>
-                                        <p:tgtEl>
-                                          <p:spTgt spid="4"/>
-                                        </p:tgtEl>
-                                        <p:attrNameLst>
-                                          <p:attrName>style.visibility</p:attrName>
-                                        </p:attrNameLst>
-                                      </p:cBhvr>
-                                      <p:to>
-                                        <p:strVal val="visible"/>
-                                      </p:to>
-                                    </p:set>
-                                    <p:anim calcmode="lin" valueType="num">
-                                      <p:cBhvr>
-                                        <p:cTn id="7" dur="500" fill="hold"/>
-                                        <p:tgtEl>
-                                          <p:spTgt spid="4"/>
-                                        </p:tgtEl>
-                                        <p:attrNameLst>
-                                          <p:attrName>ppt_w</p:attrName>
-                                        </p:attrNameLst>
-                                      </p:cBhvr>
-                                      <p:tavLst>
-                                        <p:tav tm="0">
-                                          <p:val>
-                                            <p:fltVal val="0"/>
-                                          </p:val>
-                                        </p:tav>
-                                        <p:tav tm="100000">
-                                          <p:val>
-                                            <p:strVal val="#ppt_w"/>
-                                          </p:val>
-                                        </p:tav>
-                                      </p:tavLst>
-                                    </p:anim>
-                                    <p:anim calcmode="lin" valueType="num">
-                                      <p:cBhvr>
-                                        <p:cTn id="8" dur="500" fill="hold"/>
-                                        <p:tgtEl>
-                                          <p:spTgt spid="4"/>
-                                        </p:tgtEl>
-                                        <p:attrNameLst>
-                                          <p:attrName>ppt_h</p:attrName>
-                                        </p:attrNameLst>
-                                      </p:cBhvr>
-                                      <p:tavLst>
-                                        <p:tav tm="0">
-                                          <p:val>
-                                            <p:fltVal val="0"/>
-                                          </p:val>
-                                        </p:tav>
-                                        <p:tav tm="100000">
-                                          <p:val>
-                                            <p:strVal val="#ppt_h"/>
-                                          </p:val>
-                                        </p:tav>
-                                      </p:tavLst>
-                                    </p:anim>
-                                    <p:animEffect transition="in" filter="fade">
-                                      <p:cBhvr>
-                                        <p:cTn id="9" dur="500"/>
-                                        <p:tgtEl>
-                                          <p:spTgt spid="4"/>
-                                        </p:tgtEl>
-                                      </p:cBhvr>
-                                    </p:animEffect>
-                                  </p:childTnLst>
-                                </p:cTn>
-                              </p:par>
-                            </p:childTnLst>
-                          </p:cTn>
-                        </p:par>
-                      </p:childTnLst>
-                    </p:cTn>
-                  </p:par>
-                  <p:par>
-                    <p:cTn id="10" fill="hold">
-                      <p:stCondLst>
-                        <p:cond delay="indefinite"/>
-                      </p:stCondLst>
-                      <p:childTnLst>
-                        <p:par>
-                          <p:cTn id="11" fill="hold">
-                            <p:stCondLst>
-                              <p:cond delay="0"/>
-                            </p:stCondLst>
-                            <p:childTnLst>
-                              <p:par>
-                                <p:cTn id="12" presetID="42" presetClass="entr" presetSubtype="0" fill="hold" grpId="0" nodeType="clickEffect" nodePh="1">
-                                  <p:stCondLst>
-                                    <p:cond delay="0"/>
-                                  </p:stCondLst>
-                                  <p:endCondLst>
-                                    <p:cond evt="begin" delay="0">
-                                      <p:tn val="12"/>
-                                    </p:cond>
-                                  </p:endCondLst>
-                                  <p:childTnLst>
-                                    <p:set>
-                                      <p:cBhvr>
-                                        <p:cTn id="13" dur="1" fill="hold">
-                                          <p:stCondLst>
-                                            <p:cond delay="0"/>
-                                          </p:stCondLst>
-                                        </p:cTn>
-                                        <p:tgtEl>
-                                          <p:spTgt spid="7"/>
-                                        </p:tgtEl>
-                                        <p:attrNameLst>
-                                          <p:attrName>style.visibility</p:attrName>
-                                        </p:attrNameLst>
-                                      </p:cBhvr>
-                                      <p:to>
-                                        <p:strVal val="visible"/>
-                                      </p:to>
-                                    </p:set>
-                                    <p:animEffect transition="in" filter="fade">
-                                      <p:cBhvr>
-                                        <p:cTn id="14" dur="1000"/>
-                                        <p:tgtEl>
-                                          <p:spTgt spid="7"/>
-                                        </p:tgtEl>
-                                      </p:cBhvr>
-                                    </p:animEffect>
-                                    <p:anim calcmode="lin" valueType="num">
-                                      <p:cBhvr>
-                                        <p:cTn id="15" dur="1000" fill="hold"/>
-                                        <p:tgtEl>
-                                          <p:spTgt spid="7"/>
-                                        </p:tgtEl>
-                                        <p:attrNameLst>
-                                          <p:attrName>ppt_x</p:attrName>
-                                        </p:attrNameLst>
-                                      </p:cBhvr>
-                                      <p:tavLst>
-                                        <p:tav tm="0">
-                                          <p:val>
-                                            <p:strVal val="#ppt_x"/>
-                                          </p:val>
-                                        </p:tav>
-                                        <p:tav tm="100000">
-                                          <p:val>
-                                            <p:strVal val="#ppt_x"/>
-                                          </p:val>
-                                        </p:tav>
-                                      </p:tavLst>
-                                    </p:anim>
-                                    <p:anim calcmode="lin" valueType="num">
-                                      <p:cBhvr>
-                                        <p:cTn id="16" dur="1000" fill="hold"/>
-                                        <p:tgtEl>
-                                          <p:spTgt spid="7"/>
-                                        </p:tgtEl>
-                                        <p:attrNameLst>
-                                          <p:attrName>ppt_y</p:attrName>
-                                        </p:attrNameLst>
-                                      </p:cBhvr>
-                                      <p:tavLst>
-                                        <p:tav tm="0">
-                                          <p:val>
-                                            <p:strVal val="#ppt_y+.1"/>
-                                          </p:val>
-                                        </p:tav>
-                                        <p:tav tm="100000">
-                                          <p:val>
-                                            <p:strVal val="#ppt_y"/>
-                                          </p:val>
-                                        </p:tav>
-                                      </p:tavLst>
-                                    </p:anim>
-                                  </p:childTnLst>
-                                </p:cTn>
-                              </p:par>
-                            </p:childTnLst>
-                          </p:cTn>
-                        </p:par>
-                      </p:childTnLst>
-                    </p:cTn>
-                  </p:par>
-                  <p:par>
-                    <p:cTn id="17" fill="hold">
-                      <p:stCondLst>
-                        <p:cond delay="indefinite"/>
-                      </p:stCondLst>
-                      <p:childTnLst>
-                        <p:par>
-                          <p:cTn id="18" fill="hold">
-                            <p:stCondLst>
-                              <p:cond delay="0"/>
-                            </p:stCondLst>
-                            <p:childTnLst>
-                              <p:par>
-                                <p:cTn id="19" presetID="42" presetClass="entr" presetSubtype="0" fill="hold" grpId="0" nodeType="clickEffect" nodePh="1">
-                                  <p:stCondLst>
-                                    <p:cond delay="0"/>
-                                  </p:stCondLst>
-                                  <p:endCondLst>
-                                    <p:cond evt="begin" delay="0">
-                                      <p:tn val="19"/>
-                                    </p:cond>
-                                  </p:endCondLst>
-                                  <p:childTnLst>
-                                    <p:set>
-                                      <p:cBhvr>
-                                        <p:cTn id="20" dur="1" fill="hold">
-                                          <p:stCondLst>
-                                            <p:cond delay="0"/>
-                                          </p:stCondLst>
-                                        </p:cTn>
-                                        <p:tgtEl>
-                                          <p:spTgt spid="8"/>
-                                        </p:tgtEl>
-                                        <p:attrNameLst>
-                                          <p:attrName>style.visibility</p:attrName>
-                                        </p:attrNameLst>
-                                      </p:cBhvr>
-                                      <p:to>
-                                        <p:strVal val="visible"/>
-                                      </p:to>
-                                    </p:set>
-                                    <p:animEffect transition="in" filter="fade">
-                                      <p:cBhvr>
-                                        <p:cTn id="21" dur="1000"/>
-                                        <p:tgtEl>
-                                          <p:spTgt spid="8"/>
-                                        </p:tgtEl>
-                                      </p:cBhvr>
-                                    </p:animEffect>
-                                    <p:anim calcmode="lin" valueType="num">
-                                      <p:cBhvr>
-                                        <p:cTn id="22" dur="1000" fill="hold"/>
-                                        <p:tgtEl>
-                                          <p:spTgt spid="8"/>
-                                        </p:tgtEl>
-                                        <p:attrNameLst>
-                                          <p:attrName>ppt_x</p:attrName>
-                                        </p:attrNameLst>
-                                      </p:cBhvr>
-                                      <p:tavLst>
-                                        <p:tav tm="0">
-                                          <p:val>
-                                            <p:strVal val="#ppt_x"/>
-                                          </p:val>
-                                        </p:tav>
-                                        <p:tav tm="100000">
-                                          <p:val>
-                                            <p:strVal val="#ppt_x"/>
-                                          </p:val>
-                                        </p:tav>
-                                      </p:tavLst>
-                                    </p:anim>
-                                    <p:anim calcmode="lin" valueType="num">
-                                      <p:cBhvr>
-                                        <p:cTn id="23" dur="1000" fill="hold"/>
-                                        <p:tgtEl>
-                                          <p:spTgt spid="8"/>
-                                        </p:tgtEl>
-                                        <p:attrNameLst>
-                                          <p:attrName>ppt_y</p:attrName>
-                                        </p:attrNameLst>
-                                      </p:cBhvr>
-                                      <p:tavLst>
-                                        <p:tav tm="0">
-                                          <p:val>
-                                            <p:strVal val="#ppt_y+.1"/>
-                                          </p:val>
-                                        </p:tav>
-                                        <p:tav tm="100000">
-                                          <p:val>
-                                            <p:strVal val="#ppt_y"/>
-                                          </p:val>
-                                        </p:tav>
-                                      </p:tavLst>
-                                    </p:anim>
-                                  </p:childTnLst>
-                                </p:cTn>
-                              </p:par>
-                            </p:childTnLst>
-                          </p:cTn>
-                        </p:par>
-                      </p:childTnLst>
-                    </p:cTn>
-                  </p:par>
-                </p:childTnLst>
-              </p:cTn>
-              <p:prevCondLst>
-                <p:cond evt="onPrev" delay="0">
-                  <p:tgtEl>
-                    <p:sldTgt/>
-                  </p:tgtEl>
-                </p:cond>
-              </p:prevCondLst>
-              <p:nextCondLst>
-                <p:cond evt="onNext" delay="0">
-                  <p:tgtEl>
-                    <p:sldTgt/>
-                  </p:tgtEl>
-                </p:cond>
-              </p:nextCondLst>
-            </p:seq>
-          </p:childTnLst>
-        </p:cTn>
-      </p:par>
-    </p:tnLst>
-    <p:bldLst>
-      <p:bldP spid="4" grpId="0"/>
-      <p:bldP spid="7" grpId="0"/>
-      <p:bldP spid="8" grpId="0"/>
-    </p:bldLst>
-  </p:timing>
-</p:sld>
-</file>
-
-<file path=ppt/slides/slide15.xml><?xml version="1.0" encoding="utf-8"?>
-<p:sld xmlns:a="http://schemas.openxmlformats.org/drawingml/2006/main" xmlns:r="http://schemas.openxmlformats.org/officeDocument/2006/relationships" xmlns:p="http://schemas.openxmlformats.org/presentationml/2006/main">
-  <p:cSld>
-    <p:spTree>
-      <p:nvGrpSpPr>
-        <p:cNvPr id="1" name="">
-          <a:extLst>
-            <a:ext uri="{FF2B5EF4-FFF2-40B4-BE49-F238E27FC236}">
               <a16:creationId xmlns:a16="http://schemas.microsoft.com/office/drawing/2014/main" id="{E46E94ED-1743-306E-1CA1-9410A2B50996}"/>
             </a:ext>
           </a:extLst>
@@ -17165,7 +15133,7 @@
 </p:sld>
 </file>
 
-<file path=ppt/slides/slide16.xml><?xml version="1.0" encoding="utf-8"?>
+<file path=ppt/slides/slide14.xml><?xml version="1.0" encoding="utf-8"?>
 <p:sld xmlns:a="http://schemas.openxmlformats.org/drawingml/2006/main" xmlns:r="http://schemas.openxmlformats.org/officeDocument/2006/relationships" xmlns:p="http://schemas.openxmlformats.org/presentationml/2006/main">
   <p:cSld>
     <p:spTree>
@@ -17254,271 +15222,6 @@
       </p:sp>
       <p:sp>
         <p:nvSpPr>
-          <p:cNvPr id="7" name="Text Placeholder 30">
-            <a:extLst>
-              <a:ext uri="{FF2B5EF4-FFF2-40B4-BE49-F238E27FC236}">
-                <a16:creationId xmlns:a16="http://schemas.microsoft.com/office/drawing/2014/main" id="{AF1C8809-654A-4DD1-BB18-87B8B6C020B9}"/>
-              </a:ext>
-            </a:extLst>
-          </p:cNvPr>
-          <p:cNvSpPr txBox="1">
-            <a:spLocks/>
-          </p:cNvSpPr>
-          <p:nvPr/>
-        </p:nvSpPr>
-        <p:spPr>
-          <a:xfrm>
-            <a:off x="320982" y="1275371"/>
-            <a:ext cx="7820386" cy="666078"/>
-          </a:xfrm>
-          <a:prstGeom prst="rect">
-            <a:avLst/>
-          </a:prstGeom>
-        </p:spPr>
-        <p:txBody>
-          <a:bodyPr vert="horz" lIns="91440" tIns="45720" rIns="91440" bIns="45720" rtlCol="0">
-            <a:normAutofit fontScale="92500" lnSpcReduction="10000"/>
-          </a:bodyPr>
-          <a:lstStyle>
-            <a:lvl1pPr marL="0" indent="0" algn="ctr" defTabSz="457200" rtl="0" eaLnBrk="1" latinLnBrk="0" hangingPunct="1">
-              <a:spcBef>
-                <a:spcPts val="1000"/>
-              </a:spcBef>
-              <a:spcAft>
-                <a:spcPts val="0"/>
-              </a:spcAft>
-              <a:buClr>
-                <a:schemeClr val="accent1"/>
-              </a:buClr>
-              <a:buSzPct val="80000"/>
-              <a:buFont typeface="Wingdings 3" charset="2"/>
-              <a:buNone/>
-              <a:defRPr lang="en-US" sz="1600" kern="1200" dirty="0" smtClean="0">
-                <a:solidFill>
-                  <a:schemeClr val="tx1"/>
-                </a:solidFill>
-                <a:latin typeface="+mn-lt"/>
-                <a:ea typeface="+mn-ea"/>
-                <a:cs typeface="+mn-cs"/>
-              </a:defRPr>
-            </a:lvl1pPr>
-            <a:lvl2pPr marL="742950" indent="-285750" algn="l" defTabSz="457200" rtl="0" eaLnBrk="1" latinLnBrk="0" hangingPunct="1">
-              <a:spcBef>
-                <a:spcPts val="1000"/>
-              </a:spcBef>
-              <a:spcAft>
-                <a:spcPts val="0"/>
-              </a:spcAft>
-              <a:buClr>
-                <a:schemeClr val="accent1"/>
-              </a:buClr>
-              <a:buSzPct val="80000"/>
-              <a:buFont typeface="Wingdings 3" charset="2"/>
-              <a:buChar char=""/>
-              <a:defRPr sz="1600" kern="1200">
-                <a:solidFill>
-                  <a:schemeClr val="tx1">
-                    <a:lumMod val="75000"/>
-                    <a:lumOff val="25000"/>
-                  </a:schemeClr>
-                </a:solidFill>
-                <a:latin typeface="+mn-lt"/>
-                <a:ea typeface="+mn-ea"/>
-                <a:cs typeface="+mn-cs"/>
-              </a:defRPr>
-            </a:lvl2pPr>
-            <a:lvl3pPr marL="1143000" indent="-228600" algn="l" defTabSz="457200" rtl="0" eaLnBrk="1" latinLnBrk="0" hangingPunct="1">
-              <a:spcBef>
-                <a:spcPts val="1000"/>
-              </a:spcBef>
-              <a:spcAft>
-                <a:spcPts val="0"/>
-              </a:spcAft>
-              <a:buClr>
-                <a:schemeClr val="accent1"/>
-              </a:buClr>
-              <a:buSzPct val="80000"/>
-              <a:buFont typeface="Wingdings 3" charset="2"/>
-              <a:buChar char=""/>
-              <a:defRPr sz="1400" kern="1200">
-                <a:solidFill>
-                  <a:schemeClr val="tx1">
-                    <a:lumMod val="75000"/>
-                    <a:lumOff val="25000"/>
-                  </a:schemeClr>
-                </a:solidFill>
-                <a:latin typeface="+mn-lt"/>
-                <a:ea typeface="+mn-ea"/>
-                <a:cs typeface="+mn-cs"/>
-              </a:defRPr>
-            </a:lvl3pPr>
-            <a:lvl4pPr marL="1600200" indent="-228600" algn="l" defTabSz="457200" rtl="0" eaLnBrk="1" latinLnBrk="0" hangingPunct="1">
-              <a:spcBef>
-                <a:spcPts val="1000"/>
-              </a:spcBef>
-              <a:spcAft>
-                <a:spcPts val="0"/>
-              </a:spcAft>
-              <a:buClr>
-                <a:schemeClr val="accent1"/>
-              </a:buClr>
-              <a:buSzPct val="80000"/>
-              <a:buFont typeface="Wingdings 3" charset="2"/>
-              <a:buChar char=""/>
-              <a:defRPr sz="1200" kern="1200">
-                <a:solidFill>
-                  <a:schemeClr val="tx1">
-                    <a:lumMod val="75000"/>
-                    <a:lumOff val="25000"/>
-                  </a:schemeClr>
-                </a:solidFill>
-                <a:latin typeface="+mn-lt"/>
-                <a:ea typeface="+mn-ea"/>
-                <a:cs typeface="+mn-cs"/>
-              </a:defRPr>
-            </a:lvl4pPr>
-            <a:lvl5pPr marL="2057400" indent="-228600" algn="l" defTabSz="457200" rtl="0" eaLnBrk="1" latinLnBrk="0" hangingPunct="1">
-              <a:spcBef>
-                <a:spcPts val="1000"/>
-              </a:spcBef>
-              <a:spcAft>
-                <a:spcPts val="0"/>
-              </a:spcAft>
-              <a:buClr>
-                <a:schemeClr val="accent1"/>
-              </a:buClr>
-              <a:buSzPct val="80000"/>
-              <a:buFont typeface="Wingdings 3" charset="2"/>
-              <a:buChar char=""/>
-              <a:defRPr sz="1200" kern="1200">
-                <a:solidFill>
-                  <a:schemeClr val="tx1">
-                    <a:lumMod val="75000"/>
-                    <a:lumOff val="25000"/>
-                  </a:schemeClr>
-                </a:solidFill>
-                <a:latin typeface="+mn-lt"/>
-                <a:ea typeface="+mn-ea"/>
-                <a:cs typeface="+mn-cs"/>
-              </a:defRPr>
-            </a:lvl5pPr>
-            <a:lvl6pPr marL="2514600" indent="-228600" algn="l" defTabSz="457200" rtl="0" eaLnBrk="1" latinLnBrk="0" hangingPunct="1">
-              <a:spcBef>
-                <a:spcPts val="1000"/>
-              </a:spcBef>
-              <a:spcAft>
-                <a:spcPts val="0"/>
-              </a:spcAft>
-              <a:buClr>
-                <a:schemeClr val="accent1"/>
-              </a:buClr>
-              <a:buSzPct val="80000"/>
-              <a:buFont typeface="Wingdings 3" charset="2"/>
-              <a:buChar char=""/>
-              <a:defRPr sz="1200" kern="1200">
-                <a:solidFill>
-                  <a:schemeClr val="tx1">
-                    <a:lumMod val="75000"/>
-                    <a:lumOff val="25000"/>
-                  </a:schemeClr>
-                </a:solidFill>
-                <a:latin typeface="+mn-lt"/>
-                <a:ea typeface="+mn-ea"/>
-                <a:cs typeface="+mn-cs"/>
-              </a:defRPr>
-            </a:lvl6pPr>
-            <a:lvl7pPr marL="2971800" indent="-228600" algn="l" defTabSz="457200" rtl="0" eaLnBrk="1" latinLnBrk="0" hangingPunct="1">
-              <a:spcBef>
-                <a:spcPts val="1000"/>
-              </a:spcBef>
-              <a:spcAft>
-                <a:spcPts val="0"/>
-              </a:spcAft>
-              <a:buClr>
-                <a:schemeClr val="accent1"/>
-              </a:buClr>
-              <a:buSzPct val="80000"/>
-              <a:buFont typeface="Wingdings 3" charset="2"/>
-              <a:buChar char=""/>
-              <a:defRPr sz="1200" kern="1200">
-                <a:solidFill>
-                  <a:schemeClr val="tx1">
-                    <a:lumMod val="75000"/>
-                    <a:lumOff val="25000"/>
-                  </a:schemeClr>
-                </a:solidFill>
-                <a:latin typeface="+mn-lt"/>
-                <a:ea typeface="+mn-ea"/>
-                <a:cs typeface="+mn-cs"/>
-              </a:defRPr>
-            </a:lvl7pPr>
-            <a:lvl8pPr marL="3429000" indent="-228600" algn="l" defTabSz="457200" rtl="0" eaLnBrk="1" latinLnBrk="0" hangingPunct="1">
-              <a:spcBef>
-                <a:spcPts val="1000"/>
-              </a:spcBef>
-              <a:spcAft>
-                <a:spcPts val="0"/>
-              </a:spcAft>
-              <a:buClr>
-                <a:schemeClr val="accent1"/>
-              </a:buClr>
-              <a:buSzPct val="80000"/>
-              <a:buFont typeface="Wingdings 3" charset="2"/>
-              <a:buChar char=""/>
-              <a:defRPr sz="1200" kern="1200">
-                <a:solidFill>
-                  <a:schemeClr val="tx1">
-                    <a:lumMod val="75000"/>
-                    <a:lumOff val="25000"/>
-                  </a:schemeClr>
-                </a:solidFill>
-                <a:latin typeface="+mn-lt"/>
-                <a:ea typeface="+mn-ea"/>
-                <a:cs typeface="+mn-cs"/>
-              </a:defRPr>
-            </a:lvl8pPr>
-            <a:lvl9pPr marL="3886200" indent="-228600" algn="l" defTabSz="457200" rtl="0" eaLnBrk="1" latinLnBrk="0" hangingPunct="1">
-              <a:spcBef>
-                <a:spcPts val="1000"/>
-              </a:spcBef>
-              <a:spcAft>
-                <a:spcPts val="0"/>
-              </a:spcAft>
-              <a:buClr>
-                <a:schemeClr val="accent1"/>
-              </a:buClr>
-              <a:buSzPct val="80000"/>
-              <a:buFont typeface="Wingdings 3" charset="2"/>
-              <a:buChar char=""/>
-              <a:defRPr sz="1200" kern="1200">
-                <a:solidFill>
-                  <a:schemeClr val="tx1">
-                    <a:lumMod val="75000"/>
-                    <a:lumOff val="25000"/>
-                  </a:schemeClr>
-                </a:solidFill>
-                <a:latin typeface="+mn-lt"/>
-                <a:ea typeface="+mn-ea"/>
-                <a:cs typeface="+mn-cs"/>
-              </a:defRPr>
-            </a:lvl9pPr>
-          </a:lstStyle>
-          <a:p>
-            <a:r>
-              <a:rPr lang="en-GB" sz="2000" dirty="0">
-                <a:hlinkClick r:id="rId3"/>
-              </a:rPr>
-              <a:t>https://github.com/KushalPanchal1212/CAR-DEKHO-USED-CAR-DATA-ANALYSIS-PROJECT.git</a:t>
-            </a:r>
-            <a:endParaRPr lang="en-GB" sz="2000" dirty="0"/>
-          </a:p>
-          <a:p>
-            <a:endParaRPr lang="en-GB" sz="2000" dirty="0"/>
-          </a:p>
-        </p:txBody>
-      </p:sp>
-      <p:sp>
-        <p:nvSpPr>
           <p:cNvPr id="8" name="Text Placeholder 30">
             <a:extLst>
               <a:ext uri="{FF2B5EF4-FFF2-40B4-BE49-F238E27FC236}">
@@ -17770,6 +15473,47 @@
           </a:lstStyle>
           <a:p>
             <a:endParaRPr lang="en-GB" sz="2000" dirty="0"/>
+          </a:p>
+        </p:txBody>
+      </p:sp>
+      <p:sp>
+        <p:nvSpPr>
+          <p:cNvPr id="9" name="TextBox 8">
+            <a:extLst>
+              <a:ext uri="{FF2B5EF4-FFF2-40B4-BE49-F238E27FC236}">
+                <a16:creationId xmlns:a16="http://schemas.microsoft.com/office/drawing/2014/main" id="{69FB91D6-C9AE-829B-4E76-3BDA8CA06C70}"/>
+              </a:ext>
+            </a:extLst>
+          </p:cNvPr>
+          <p:cNvSpPr txBox="1"/>
+          <p:nvPr/>
+        </p:nvSpPr>
+        <p:spPr>
+          <a:xfrm>
+            <a:off x="780047" y="1473550"/>
+            <a:ext cx="6100010" cy="923330"/>
+          </a:xfrm>
+          <a:prstGeom prst="rect">
+            <a:avLst/>
+          </a:prstGeom>
+          <a:noFill/>
+        </p:spPr>
+        <p:txBody>
+          <a:bodyPr wrap="square">
+            <a:spAutoFit/>
+          </a:bodyPr>
+          <a:lstStyle/>
+          <a:p>
+            <a:r>
+              <a:rPr lang="en-IN" dirty="0">
+                <a:hlinkClick r:id="rId3"/>
+              </a:rPr>
+              <a:t>https://github.com/KushalPanchal1212/Seasonal-Agriculture-Performance-Analysis.git</a:t>
+            </a:r>
+            <a:endParaRPr lang="en-IN" dirty="0"/>
+          </a:p>
+          <a:p>
+            <a:endParaRPr lang="en-IN" dirty="0"/>
           </a:p>
         </p:txBody>
       </p:sp>
@@ -17903,118 +15647,19 @@
                             </p:stCondLst>
                             <p:childTnLst>
                               <p:par>
-                                <p:cTn id="12" presetID="42" presetClass="entr" presetSubtype="0" fill="hold" grpId="0" nodeType="clickEffect">
-                                  <p:stCondLst>
-                                    <p:cond delay="0"/>
-                                  </p:stCondLst>
-                                  <p:childTnLst>
-                                    <p:set>
-                                      <p:cBhvr>
-                                        <p:cTn id="13" dur="1" fill="hold">
-                                          <p:stCondLst>
-                                            <p:cond delay="0"/>
-                                          </p:stCondLst>
-                                        </p:cTn>
-                                        <p:tgtEl>
-                                          <p:spTgt spid="7"/>
-                                        </p:tgtEl>
-                                        <p:attrNameLst>
-                                          <p:attrName>style.visibility</p:attrName>
-                                        </p:attrNameLst>
-                                      </p:cBhvr>
-                                      <p:to>
-                                        <p:strVal val="visible"/>
-                                      </p:to>
-                                    </p:set>
-                                    <p:animEffect transition="in" filter="fade">
-                                      <p:cBhvr>
-                                        <p:cTn id="14" dur="1000"/>
-                                        <p:tgtEl>
-                                          <p:spTgt spid="7"/>
-                                        </p:tgtEl>
-                                      </p:cBhvr>
-                                    </p:animEffect>
-                                    <p:anim calcmode="lin" valueType="num">
-                                      <p:cBhvr>
-                                        <p:cTn id="15" dur="1000" fill="hold"/>
-                                        <p:tgtEl>
-                                          <p:spTgt spid="7"/>
-                                        </p:tgtEl>
-                                        <p:attrNameLst>
-                                          <p:attrName>ppt_x</p:attrName>
-                                        </p:attrNameLst>
-                                      </p:cBhvr>
-                                      <p:tavLst>
-                                        <p:tav tm="0">
-                                          <p:val>
-                                            <p:strVal val="#ppt_x"/>
-                                          </p:val>
-                                        </p:tav>
-                                        <p:tav tm="100000">
-                                          <p:val>
-                                            <p:strVal val="#ppt_x"/>
-                                          </p:val>
-                                        </p:tav>
-                                      </p:tavLst>
-                                    </p:anim>
-                                    <p:anim calcmode="lin" valueType="num">
-                                      <p:cBhvr>
-                                        <p:cTn id="16" dur="1000" fill="hold"/>
-                                        <p:tgtEl>
-                                          <p:spTgt spid="7"/>
-                                        </p:tgtEl>
-                                        <p:attrNameLst>
-                                          <p:attrName>ppt_y</p:attrName>
-                                        </p:attrNameLst>
-                                      </p:cBhvr>
-                                      <p:tavLst>
-                                        <p:tav tm="0">
-                                          <p:val>
-                                            <p:strVal val="#ppt_y+.1"/>
-                                          </p:val>
-                                        </p:tav>
-                                        <p:tav tm="100000">
-                                          <p:val>
-                                            <p:strVal val="#ppt_y"/>
-                                          </p:val>
-                                        </p:tav>
-                                      </p:tavLst>
-                                    </p:anim>
-                                  </p:childTnLst>
-                                </p:cTn>
-                              </p:par>
-                            </p:childTnLst>
-                          </p:cTn>
-                        </p:par>
-                      </p:childTnLst>
-                    </p:cTn>
-                  </p:par>
-                  <p:par>
-                    <p:cTn id="17" fill="hold">
-                      <p:stCondLst>
-                        <p:cond delay="indefinite"/>
-                      </p:stCondLst>
-                      <p:childTnLst>
-                        <p:par>
-                          <p:cTn id="18" fill="hold">
-                            <p:stCondLst>
-                              <p:cond delay="0"/>
-                            </p:stCondLst>
-                            <p:childTnLst>
-                              <p:par>
-                                <p:cTn id="19" presetID="42" presetClass="entr" presetSubtype="0" fill="hold" grpId="0" nodeType="clickEffect" nodePh="1">
+                                <p:cTn id="12" presetID="42" presetClass="entr" presetSubtype="0" fill="hold" grpId="0" nodeType="clickEffect" nodePh="1">
                                   <p:stCondLst>
                                     <p:cond delay="0"/>
                                   </p:stCondLst>
                                   <p:endCondLst>
                                     <p:cond evt="begin" delay="0">
-                                      <p:tn val="19"/>
+                                      <p:tn val="12"/>
                                     </p:cond>
                                   </p:endCondLst>
                                   <p:childTnLst>
                                     <p:set>
                                       <p:cBhvr>
-                                        <p:cTn id="20" dur="1" fill="hold">
+                                        <p:cTn id="13" dur="1" fill="hold">
                                           <p:stCondLst>
                                             <p:cond delay="0"/>
                                           </p:stCondLst>
@@ -18032,7 +15677,7 @@
                                     </p:set>
                                     <p:animEffect transition="in" filter="fade">
                                       <p:cBhvr>
-                                        <p:cTn id="21" dur="1000"/>
+                                        <p:cTn id="14" dur="1000"/>
                                         <p:tgtEl>
                                           <p:spTgt spid="8"/>
                                         </p:tgtEl>
@@ -18040,7 +15685,7 @@
                                     </p:animEffect>
                                     <p:anim calcmode="lin" valueType="num">
                                       <p:cBhvr>
-                                        <p:cTn id="22" dur="1000" fill="hold"/>
+                                        <p:cTn id="15" dur="1000" fill="hold"/>
                                         <p:tgtEl>
                                           <p:spTgt spid="8"/>
                                         </p:tgtEl>
@@ -18063,7 +15708,7 @@
                                     </p:anim>
                                     <p:anim calcmode="lin" valueType="num">
                                       <p:cBhvr>
-                                        <p:cTn id="23" dur="1000" fill="hold"/>
+                                        <p:cTn id="16" dur="1000" fill="hold"/>
                                         <p:tgtEl>
                                           <p:spTgt spid="8"/>
                                         </p:tgtEl>
@@ -18116,14 +15761,13 @@
     </p:tnLst>
     <p:bldLst>
       <p:bldP spid="4" grpId="0"/>
-      <p:bldP spid="7" grpId="0"/>
       <p:bldP spid="8" grpId="0"/>
     </p:bldLst>
   </p:timing>
 </p:sld>
 </file>
 
-<file path=ppt/slides/slide17.xml><?xml version="1.0" encoding="utf-8"?>
+<file path=ppt/slides/slide15.xml><?xml version="1.0" encoding="utf-8"?>
 <p:sld xmlns:a="http://schemas.openxmlformats.org/drawingml/2006/main" xmlns:r="http://schemas.openxmlformats.org/officeDocument/2006/relationships" xmlns:p="http://schemas.openxmlformats.org/presentationml/2006/main">
   <p:cSld>
     <p:spTree>
@@ -19114,7 +16758,7 @@
 </p:sld>
 </file>
 
-<file path=ppt/slides/slide18.xml><?xml version="1.0" encoding="utf-8"?>
+<file path=ppt/slides/slide16.xml><?xml version="1.0" encoding="utf-8"?>
 <p:sld xmlns:a="http://schemas.openxmlformats.org/drawingml/2006/main" xmlns:r="http://schemas.openxmlformats.org/officeDocument/2006/relationships" xmlns:p="http://schemas.openxmlformats.org/presentationml/2006/main">
   <p:cSld>
     <p:spTree>
